--- a/docs/proj3_report.pptx
+++ b/docs/proj3_report.pptx
@@ -889,8 +889,8 @@
         </p:nvSpPr>
         <p:spPr>
           <a:xfrm>
-            <a:off x="1143225" y="685800"/>
-            <a:ext cx="4572225" cy="3429000"/>
+            <a:off x="381000" y="685800"/>
+            <a:ext cx="6096000" cy="3429000"/>
           </a:xfrm>
           <a:custGeom>
             <a:avLst/>
@@ -1513,8 +1513,8 @@
         </p:nvSpPr>
         <p:spPr>
           <a:xfrm>
-            <a:off x="1143225" y="685800"/>
-            <a:ext cx="4572225" cy="3429000"/>
+            <a:off x="381000" y="685800"/>
+            <a:ext cx="6096000" cy="3429000"/>
           </a:xfrm>
           <a:custGeom>
             <a:avLst/>
@@ -1721,8 +1721,8 @@
         </p:nvSpPr>
         <p:spPr>
           <a:xfrm>
-            <a:off x="1143225" y="685800"/>
-            <a:ext cx="4572225" cy="3429000"/>
+            <a:off x="381000" y="685800"/>
+            <a:ext cx="6096000" cy="3429000"/>
           </a:xfrm>
           <a:custGeom>
             <a:avLst/>
@@ -1825,8 +1825,8 @@
         </p:nvSpPr>
         <p:spPr>
           <a:xfrm>
-            <a:off x="1143225" y="685800"/>
-            <a:ext cx="4572225" cy="3429000"/>
+            <a:off x="381000" y="685800"/>
+            <a:ext cx="6096000" cy="3429000"/>
           </a:xfrm>
           <a:custGeom>
             <a:avLst/>
@@ -1929,8 +1929,8 @@
         </p:nvSpPr>
         <p:spPr>
           <a:xfrm>
-            <a:off x="1143225" y="685800"/>
-            <a:ext cx="4572225" cy="3429000"/>
+            <a:off x="381000" y="685800"/>
+            <a:ext cx="6096000" cy="3429000"/>
           </a:xfrm>
           <a:custGeom>
             <a:avLst/>
@@ -2033,8 +2033,8 @@
         </p:nvSpPr>
         <p:spPr>
           <a:xfrm>
-            <a:off x="1143225" y="685800"/>
-            <a:ext cx="4572225" cy="3429000"/>
+            <a:off x="381000" y="685800"/>
+            <a:ext cx="6096000" cy="3429000"/>
           </a:xfrm>
           <a:custGeom>
             <a:avLst/>
@@ -2137,8 +2137,8 @@
         </p:nvSpPr>
         <p:spPr>
           <a:xfrm>
-            <a:off x="1143225" y="685800"/>
-            <a:ext cx="4572225" cy="3429000"/>
+            <a:off x="381000" y="685800"/>
+            <a:ext cx="6096000" cy="3429000"/>
           </a:xfrm>
           <a:custGeom>
             <a:avLst/>
@@ -2241,8 +2241,8 @@
         </p:nvSpPr>
         <p:spPr>
           <a:xfrm>
-            <a:off x="1143225" y="685800"/>
-            <a:ext cx="4572225" cy="3429000"/>
+            <a:off x="381000" y="685800"/>
+            <a:ext cx="6096000" cy="3429000"/>
           </a:xfrm>
           <a:custGeom>
             <a:avLst/>
@@ -13567,7 +13567,7 @@
               <a:buNone/>
             </a:pPr>
             <a:r>
-              <a:rPr lang="en" sz="5200" b="0" strike="noStrike">
+              <a:rPr lang="en" sz="5200" b="0" strike="noStrike" dirty="0">
                 <a:solidFill>
                   <a:schemeClr val="dk1"/>
                 </a:solidFill>
@@ -13579,7 +13579,7 @@
               <a:t>CS </a:t>
             </a:r>
             <a:r>
-              <a:rPr lang="en" sz="5200">
+              <a:rPr lang="en" sz="5200" dirty="0">
                 <a:solidFill>
                   <a:schemeClr val="dk1"/>
                 </a:solidFill>
@@ -13591,7 +13591,7 @@
               <a:t>6</a:t>
             </a:r>
             <a:r>
-              <a:rPr lang="en" sz="5200" b="0" strike="noStrike">
+              <a:rPr lang="en" sz="5200" b="0" strike="noStrike" dirty="0">
                 <a:solidFill>
                   <a:schemeClr val="dk1"/>
                 </a:solidFill>
@@ -13602,7 +13602,7 @@
               </a:rPr>
               <a:t>476 Project 3</a:t>
             </a:r>
-            <a:endParaRPr sz="5200" b="0" strike="noStrike">
+            <a:endParaRPr sz="5200" b="0" strike="noStrike" dirty="0">
               <a:solidFill>
                 <a:srgbClr val="000000"/>
               </a:solidFill>
@@ -13661,7 +13661,7 @@
               <a:buNone/>
             </a:pPr>
             <a:r>
-              <a:rPr lang="en" sz="2800" b="0" i="0" u="none" strike="noStrike" cap="none">
+              <a:rPr lang="en-US" sz="2800" b="0" i="0" u="none" strike="noStrike" cap="none" dirty="0">
                 <a:solidFill>
                   <a:schemeClr val="dk2"/>
                 </a:solidFill>
@@ -13670,9 +13670,45 @@
                 <a:cs typeface="Arial"/>
                 <a:sym typeface="Arial"/>
               </a:rPr>
-              <a:t>[name]</a:t>
+              <a:t>Venkata </a:t>
             </a:r>
-            <a:endParaRPr sz="2800" b="0" i="0" u="none" strike="noStrike" cap="none">
+            <a:r>
+              <a:rPr lang="en-US" sz="2800" b="0" i="0" u="none" strike="noStrike" cap="none" dirty="0" err="1">
+                <a:solidFill>
+                  <a:schemeClr val="dk2"/>
+                </a:solidFill>
+                <a:latin typeface="Arial"/>
+                <a:ea typeface="Arial"/>
+                <a:cs typeface="Arial"/>
+                <a:sym typeface="Arial"/>
+              </a:rPr>
+              <a:t>Aashutosh</a:t>
+            </a:r>
+            <a:r>
+              <a:rPr lang="en-US" sz="2800" b="0" i="0" u="none" strike="noStrike" cap="none" dirty="0">
+                <a:solidFill>
+                  <a:schemeClr val="dk2"/>
+                </a:solidFill>
+                <a:latin typeface="Arial"/>
+                <a:ea typeface="Arial"/>
+                <a:cs typeface="Arial"/>
+                <a:sym typeface="Arial"/>
+              </a:rPr>
+              <a:t> </a:t>
+            </a:r>
+            <a:r>
+              <a:rPr lang="en-US" sz="2800" b="0" i="0" u="none" strike="noStrike" cap="none" dirty="0" err="1">
+                <a:solidFill>
+                  <a:schemeClr val="dk2"/>
+                </a:solidFill>
+                <a:latin typeface="Arial"/>
+                <a:ea typeface="Arial"/>
+                <a:cs typeface="Arial"/>
+                <a:sym typeface="Arial"/>
+              </a:rPr>
+              <a:t>Aripirala</a:t>
+            </a:r>
+            <a:endParaRPr sz="2800" b="0" i="0" u="none" strike="noStrike" cap="none" dirty="0">
               <a:solidFill>
                 <a:srgbClr val="000000"/>
               </a:solidFill>
@@ -13701,7 +13737,7 @@
               <a:buNone/>
             </a:pPr>
             <a:r>
-              <a:rPr lang="en" sz="2800" b="0" i="0" u="none" strike="noStrike" cap="none">
+              <a:rPr lang="en-US" sz="2800" b="0" i="0" u="none" strike="noStrike" cap="none" dirty="0">
                 <a:solidFill>
                   <a:schemeClr val="dk2"/>
                 </a:solidFill>
@@ -13710,9 +13746,9 @@
                 <a:cs typeface="Arial"/>
                 <a:sym typeface="Arial"/>
               </a:rPr>
-              <a:t>[GT email]</a:t>
+              <a:t>av84@gatech.edu</a:t>
             </a:r>
-            <a:endParaRPr sz="2800" b="0" i="0" u="none" strike="noStrike" cap="none">
+            <a:endParaRPr sz="2800" b="0" i="0" u="none" strike="noStrike" cap="none" dirty="0">
               <a:solidFill>
                 <a:srgbClr val="000000"/>
               </a:solidFill>
@@ -13741,7 +13777,7 @@
               <a:buNone/>
             </a:pPr>
             <a:r>
-              <a:rPr lang="en" sz="2800" b="0" i="0" u="none" strike="noStrike" cap="none">
+              <a:rPr lang="en-US" sz="2800" b="0" i="0" u="none" strike="noStrike" cap="none" dirty="0">
                 <a:solidFill>
                   <a:schemeClr val="dk2"/>
                 </a:solidFill>
@@ -13750,9 +13786,9 @@
                 <a:cs typeface="Arial"/>
                 <a:sym typeface="Arial"/>
               </a:rPr>
-              <a:t>[GT username]</a:t>
+              <a:t>av84</a:t>
             </a:r>
-            <a:endParaRPr sz="2800" b="0" i="0" u="none" strike="noStrike" cap="none">
+            <a:endParaRPr sz="2800" b="0" i="0" u="none" strike="noStrike" cap="none" dirty="0">
               <a:solidFill>
                 <a:srgbClr val="000000"/>
               </a:solidFill>
@@ -13781,18 +13817,14 @@
               <a:buNone/>
             </a:pPr>
             <a:r>
-              <a:rPr lang="en" sz="2800" b="0" i="0" u="none" strike="noStrike" cap="none">
+              <a:rPr lang="en-US" dirty="0">
                 <a:solidFill>
                   <a:schemeClr val="dk2"/>
                 </a:solidFill>
-                <a:latin typeface="Arial"/>
-                <a:ea typeface="Arial"/>
-                <a:cs typeface="Arial"/>
-                <a:sym typeface="Arial"/>
               </a:rPr>
-              <a:t>[GT ID]</a:t>
+              <a:t>904173725</a:t>
             </a:r>
-            <a:endParaRPr sz="2800" b="0" i="0" u="none" strike="noStrike" cap="none">
+            <a:endParaRPr sz="2800" b="0" i="0" u="none" strike="noStrike" cap="none" dirty="0">
               <a:solidFill>
                 <a:srgbClr val="000000"/>
               </a:solidFill>
@@ -13820,7 +13852,7 @@
               <a:buFont typeface="Arial"/>
               <a:buNone/>
             </a:pPr>
-            <a:endParaRPr sz="2800" b="0" i="0" u="none" strike="noStrike" cap="none">
+            <a:endParaRPr sz="2800" b="0" i="0" u="none" strike="noStrike" cap="none" dirty="0">
               <a:solidFill>
                 <a:srgbClr val="000000"/>
               </a:solidFill>
@@ -14116,7 +14148,7 @@
               <a:buNone/>
             </a:pPr>
             <a:r>
-              <a:rPr lang="en" sz="2800" b="0" strike="noStrike">
+              <a:rPr lang="en" sz="2800" b="0" strike="noStrike" dirty="0">
                 <a:solidFill>
                   <a:schemeClr val="dk1"/>
                 </a:solidFill>
@@ -14125,9 +14157,21 @@
                 <a:cs typeface="Arial"/>
                 <a:sym typeface="Arial"/>
               </a:rPr>
-              <a:t>Part 3: ResNet</a:t>
+              <a:t>Part 3: </a:t>
             </a:r>
-            <a:endParaRPr sz="2800" b="0" strike="noStrike">
+            <a:r>
+              <a:rPr lang="en" sz="2800" b="0" strike="noStrike" dirty="0" err="1">
+                <a:solidFill>
+                  <a:schemeClr val="dk1"/>
+                </a:solidFill>
+                <a:latin typeface="Arial"/>
+                <a:ea typeface="Arial"/>
+                <a:cs typeface="Arial"/>
+                <a:sym typeface="Arial"/>
+              </a:rPr>
+              <a:t>ResNet</a:t>
+            </a:r>
+            <a:endParaRPr sz="2800" b="0" strike="noStrike" dirty="0">
               <a:solidFill>
                 <a:srgbClr val="000000"/>
               </a:solidFill>
@@ -14186,7 +14230,7 @@
               <a:buNone/>
             </a:pPr>
             <a:r>
-              <a:rPr lang="en" sz="1400" b="0" i="0" u="none" strike="noStrike" cap="none">
+              <a:rPr lang="en" sz="1400" b="0" i="0" u="none" strike="noStrike" cap="none" dirty="0">
                 <a:solidFill>
                   <a:schemeClr val="dk2"/>
                 </a:solidFill>
@@ -14197,9 +14241,72 @@
               </a:rPr>
               <a:t>[What does fine-tuning a network mean?]</a:t>
             </a:r>
-            <a:endParaRPr sz="1400" b="0" i="0" u="none" strike="noStrike" cap="none">
+          </a:p>
+          <a:p>
+            <a:pPr marL="0" marR="0" lvl="0" indent="0" algn="l" rtl="0">
+              <a:lnSpc>
+                <a:spcPct val="115000"/>
+              </a:lnSpc>
+              <a:spcBef>
+                <a:spcPts val="0"/>
+              </a:spcBef>
+              <a:spcAft>
+                <a:spcPts val="0"/>
+              </a:spcAft>
+              <a:buClr>
+                <a:schemeClr val="dk2"/>
+              </a:buClr>
+              <a:buSzPts val="1400"/>
+              <a:buFont typeface="Arial"/>
+              <a:buNone/>
+            </a:pPr>
+            <a:endParaRPr lang="en" sz="1400" dirty="0">
               <a:solidFill>
-                <a:srgbClr val="000000"/>
+                <a:schemeClr val="dk2"/>
+              </a:solidFill>
+            </a:endParaRPr>
+          </a:p>
+          <a:p>
+            <a:pPr marL="0" marR="0" lvl="0" indent="0" algn="l" rtl="0">
+              <a:lnSpc>
+                <a:spcPct val="115000"/>
+              </a:lnSpc>
+              <a:spcBef>
+                <a:spcPts val="0"/>
+              </a:spcBef>
+              <a:spcAft>
+                <a:spcPts val="0"/>
+              </a:spcAft>
+              <a:buClr>
+                <a:schemeClr val="dk2"/>
+              </a:buClr>
+              <a:buSzPts val="1400"/>
+              <a:buFont typeface="Arial"/>
+              <a:buNone/>
+            </a:pPr>
+            <a:r>
+              <a:rPr lang="en" sz="1200" b="0" i="0" u="none" strike="noStrike" cap="none" dirty="0">
+                <a:solidFill>
+                  <a:schemeClr val="tx1"/>
+                </a:solidFill>
+                <a:latin typeface="Arial"/>
+                <a:ea typeface="Arial"/>
+                <a:cs typeface="Arial"/>
+                <a:sym typeface="Arial"/>
+              </a:rPr>
+              <a:t>Fine-tuning is a transfer learning technique where we take a neural network that’s already been trained on a large dataset, and adapt it for a new and specific task. This allows fo</a:t>
+            </a:r>
+            <a:r>
+              <a:rPr lang="en" sz="1200" dirty="0">
+                <a:solidFill>
+                  <a:schemeClr val="tx1"/>
+                </a:solidFill>
+              </a:rPr>
+              <a:t>r us to train from a good and knowledgeable starting point, rather than having to train a model from scratch for every task. In summary, its re-training a pre-trained model on a smaller, more focused dataset to adapt its general knowledge to a specific task or domain, allowing a model to leverage its existing capabilities while becoming more accurate and specialized for a particular use case. </a:t>
+            </a:r>
+            <a:endParaRPr sz="1200" b="0" i="0" u="none" strike="noStrike" cap="none" dirty="0">
+              <a:solidFill>
+                <a:schemeClr val="tx1"/>
               </a:solidFill>
               <a:latin typeface="Arial"/>
               <a:ea typeface="Arial"/>
@@ -14256,7 +14363,7 @@
               <a:buNone/>
             </a:pPr>
             <a:r>
-              <a:rPr lang="en" sz="1400" b="0" i="0" u="none" strike="noStrike" cap="none">
+              <a:rPr lang="en" sz="1400" b="0" i="0" u="none" strike="noStrike" cap="none" dirty="0">
                 <a:solidFill>
                   <a:schemeClr val="dk2"/>
                 </a:solidFill>
@@ -14265,11 +14372,134 @@
                 <a:cs typeface="Arial"/>
                 <a:sym typeface="Arial"/>
               </a:rPr>
-              <a:t>[Why do we want to "freeze" the conv layers and some of the linear layers from a pre-trained ResNet? Why can we do this?]</a:t>
+              <a:t>[Why do we want to "freeze" the conv layers and some of the linear layers from a pre-trained </a:t>
             </a:r>
-            <a:endParaRPr sz="1400" b="0" i="0" u="none" strike="noStrike" cap="none">
+            <a:r>
+              <a:rPr lang="en" sz="1400" b="0" i="0" u="none" strike="noStrike" cap="none" dirty="0" err="1">
+                <a:solidFill>
+                  <a:schemeClr val="dk2"/>
+                </a:solidFill>
+                <a:latin typeface="Arial"/>
+                <a:ea typeface="Arial"/>
+                <a:cs typeface="Arial"/>
+                <a:sym typeface="Arial"/>
+              </a:rPr>
+              <a:t>ResNet</a:t>
+            </a:r>
+            <a:r>
+              <a:rPr lang="en" sz="1400" b="0" i="0" u="none" strike="noStrike" cap="none" dirty="0">
+                <a:solidFill>
+                  <a:schemeClr val="dk2"/>
+                </a:solidFill>
+                <a:latin typeface="Arial"/>
+                <a:ea typeface="Arial"/>
+                <a:cs typeface="Arial"/>
+                <a:sym typeface="Arial"/>
+              </a:rPr>
+              <a:t>? Why can we do this?]</a:t>
+            </a:r>
+          </a:p>
+          <a:p>
+            <a:pPr marL="0" marR="0" lvl="0" indent="0" algn="l" rtl="0">
+              <a:lnSpc>
+                <a:spcPct val="115000"/>
+              </a:lnSpc>
+              <a:spcBef>
+                <a:spcPts val="0"/>
+              </a:spcBef>
+              <a:spcAft>
+                <a:spcPts val="0"/>
+              </a:spcAft>
+              <a:buClr>
+                <a:schemeClr val="dk2"/>
+              </a:buClr>
+              <a:buSzPts val="1400"/>
+              <a:buFont typeface="Arial"/>
+              <a:buNone/>
+            </a:pPr>
+            <a:endParaRPr lang="en" sz="1400" dirty="0">
               <a:solidFill>
-                <a:srgbClr val="000000"/>
+                <a:schemeClr val="dk2"/>
+              </a:solidFill>
+            </a:endParaRPr>
+          </a:p>
+          <a:p>
+            <a:pPr marL="0" marR="0" lvl="0" indent="0" algn="l" rtl="0">
+              <a:lnSpc>
+                <a:spcPct val="115000"/>
+              </a:lnSpc>
+              <a:spcBef>
+                <a:spcPts val="0"/>
+              </a:spcBef>
+              <a:spcAft>
+                <a:spcPts val="0"/>
+              </a:spcAft>
+              <a:buClr>
+                <a:schemeClr val="dk2"/>
+              </a:buClr>
+              <a:buSzPts val="1400"/>
+              <a:buFont typeface="Arial"/>
+              <a:buNone/>
+            </a:pPr>
+            <a:r>
+              <a:rPr lang="en" sz="1200" b="0" i="0" u="none" strike="noStrike" cap="none" dirty="0">
+                <a:solidFill>
+                  <a:schemeClr val="tx1"/>
+                </a:solidFill>
+                <a:latin typeface="Arial"/>
+                <a:ea typeface="Arial"/>
+                <a:cs typeface="Arial"/>
+                <a:sym typeface="Arial"/>
+              </a:rPr>
+              <a:t>We freeze the conv layers of a pre-trained </a:t>
+            </a:r>
+            <a:r>
+              <a:rPr lang="en" sz="1200" b="0" i="0" u="none" strike="noStrike" cap="none" dirty="0" err="1">
+                <a:solidFill>
+                  <a:schemeClr val="tx1"/>
+                </a:solidFill>
+                <a:latin typeface="Arial"/>
+                <a:ea typeface="Arial"/>
+                <a:cs typeface="Arial"/>
+                <a:sym typeface="Arial"/>
+              </a:rPr>
+              <a:t>ResNet</a:t>
+            </a:r>
+            <a:r>
+              <a:rPr lang="en" sz="1200" dirty="0">
+                <a:solidFill>
+                  <a:schemeClr val="tx1"/>
+                </a:solidFill>
+              </a:rPr>
+              <a:t> to preserve and leverage the understanding of the general visual knowledge already contained in the network. This allows us to reduce the number of trainable parameters, while also preventing over-fitting on small datasets. This </a:t>
+            </a:r>
+            <a:r>
+              <a:rPr lang="en" sz="1200" dirty="0" err="1">
+                <a:solidFill>
+                  <a:schemeClr val="tx1"/>
+                </a:solidFill>
+              </a:rPr>
+              <a:t>strateg</a:t>
+            </a:r>
+            <a:r>
+              <a:rPr lang="en-IN" sz="1200" dirty="0">
+                <a:solidFill>
+                  <a:schemeClr val="tx1"/>
+                </a:solidFill>
+              </a:rPr>
+              <a:t>y</a:t>
+            </a:r>
+            <a:r>
+              <a:rPr lang="en" sz="1200" dirty="0">
+                <a:solidFill>
+                  <a:schemeClr val="tx1"/>
+                </a:solidFill>
+              </a:rPr>
+              <a:t> is also effective because we can transfer the understanding learnt by the early conv layers, like edges and textures, to our task. Therefore, we only need to train the final task-specific layers, to just learn how to combine the understandings from the early layers into our classification problem.</a:t>
+            </a:r>
+            <a:endParaRPr sz="1400" b="0" i="0" u="none" strike="noStrike" cap="none" dirty="0">
+              <a:solidFill>
+                <a:schemeClr val="tx1"/>
               </a:solidFill>
               <a:latin typeface="Arial"/>
               <a:ea typeface="Arial"/>
@@ -14433,7 +14663,7 @@
               <a:buNone/>
             </a:pPr>
             <a:r>
-              <a:rPr lang="en" sz="1400" b="0" i="0" u="none" strike="noStrike" cap="none">
+              <a:rPr lang="en" sz="1400" b="0" i="0" u="none" strike="noStrike" cap="none" dirty="0">
                 <a:solidFill>
                   <a:schemeClr val="dk2"/>
                 </a:solidFill>
@@ -14444,7 +14674,7 @@
               </a:rPr>
               <a:t>[Insert loss plot here]</a:t>
             </a:r>
-            <a:endParaRPr sz="1400" b="0" i="0" u="none" strike="noStrike" cap="none">
+            <a:endParaRPr sz="1400" b="0" i="0" u="none" strike="noStrike" cap="none" dirty="0">
               <a:solidFill>
                 <a:srgbClr val="000000"/>
               </a:solidFill>
@@ -14472,7 +14702,7 @@
               <a:buFont typeface="Arial"/>
               <a:buNone/>
             </a:pPr>
-            <a:endParaRPr sz="1400" b="0" i="0" u="none" strike="noStrike" cap="none">
+            <a:endParaRPr sz="1400" b="0" i="0" u="none" strike="noStrike" cap="none" dirty="0">
               <a:solidFill>
                 <a:srgbClr val="000000"/>
               </a:solidFill>
@@ -14500,7 +14730,7 @@
               <a:buFont typeface="Arial"/>
               <a:buNone/>
             </a:pPr>
-            <a:endParaRPr sz="1400" b="0" i="0" u="none" strike="noStrike" cap="none">
+            <a:endParaRPr sz="1400" b="0" i="0" u="none" strike="noStrike" cap="none" dirty="0">
               <a:solidFill>
                 <a:srgbClr val="000000"/>
               </a:solidFill>
@@ -14528,7 +14758,7 @@
               <a:buFont typeface="Arial"/>
               <a:buNone/>
             </a:pPr>
-            <a:endParaRPr sz="1400" b="0" i="0" u="none" strike="noStrike" cap="none">
+            <a:endParaRPr sz="1400" b="0" i="0" u="none" strike="noStrike" cap="none" dirty="0">
               <a:solidFill>
                 <a:srgbClr val="000000"/>
               </a:solidFill>
@@ -14556,7 +14786,7 @@
               <a:buFont typeface="Arial"/>
               <a:buNone/>
             </a:pPr>
-            <a:endParaRPr sz="1400" b="0" i="0" u="none" strike="noStrike" cap="none">
+            <a:endParaRPr sz="1400" b="0" i="0" u="none" strike="noStrike" cap="none" dirty="0">
               <a:solidFill>
                 <a:srgbClr val="000000"/>
               </a:solidFill>
@@ -14584,7 +14814,7 @@
               <a:buFont typeface="Arial"/>
               <a:buNone/>
             </a:pPr>
-            <a:endParaRPr sz="1400" b="0" i="0" u="none" strike="noStrike" cap="none">
+            <a:endParaRPr sz="1400" b="0" i="0" u="none" strike="noStrike" cap="none" dirty="0">
               <a:solidFill>
                 <a:srgbClr val="000000"/>
               </a:solidFill>
@@ -14612,7 +14842,7 @@
               <a:buFont typeface="Arial"/>
               <a:buNone/>
             </a:pPr>
-            <a:endParaRPr sz="1400" b="0" i="0" u="none" strike="noStrike" cap="none">
+            <a:endParaRPr sz="1400" b="0" i="0" u="none" strike="noStrike" cap="none" dirty="0">
               <a:solidFill>
                 <a:srgbClr val="000000"/>
               </a:solidFill>
@@ -14640,7 +14870,7 @@
               <a:buFont typeface="Arial"/>
               <a:buNone/>
             </a:pPr>
-            <a:endParaRPr sz="1400" b="0" i="0" u="none" strike="noStrike" cap="none">
+            <a:endParaRPr sz="1400" b="0" i="0" u="none" strike="noStrike" cap="none" dirty="0">
               <a:solidFill>
                 <a:srgbClr val="000000"/>
               </a:solidFill>
@@ -14668,7 +14898,7 @@
               <a:buFont typeface="Arial"/>
               <a:buNone/>
             </a:pPr>
-            <a:endParaRPr sz="1400" b="0" i="0" u="none" strike="noStrike" cap="none">
+            <a:endParaRPr sz="1400" b="0" i="0" u="none" strike="noStrike" cap="none" dirty="0">
               <a:solidFill>
                 <a:srgbClr val="000000"/>
               </a:solidFill>
@@ -14696,7 +14926,7 @@
               <a:buFont typeface="Arial"/>
               <a:buNone/>
             </a:pPr>
-            <a:endParaRPr sz="1400" b="0" i="0" u="none" strike="noStrike" cap="none">
+            <a:endParaRPr sz="1400" b="0" i="0" u="none" strike="noStrike" cap="none" dirty="0">
               <a:solidFill>
                 <a:srgbClr val="000000"/>
               </a:solidFill>
@@ -14725,7 +14955,7 @@
               <a:buNone/>
             </a:pPr>
             <a:r>
-              <a:rPr lang="en" sz="1400" b="0" i="0" u="none" strike="noStrike" cap="none">
+              <a:rPr lang="en" sz="1400" b="0" i="0" u="none" strike="noStrike" cap="none" dirty="0">
                 <a:solidFill>
                   <a:schemeClr val="dk2"/>
                 </a:solidFill>
@@ -14734,9 +14964,9 @@
                 <a:cs typeface="Arial"/>
                 <a:sym typeface="Arial"/>
               </a:rPr>
-              <a:t>Final training accuracy:</a:t>
+              <a:t>Final training accuracy: 91.3401%</a:t>
             </a:r>
-            <a:endParaRPr sz="1400" b="0" i="0" u="none" strike="noStrike" cap="none">
+            <a:endParaRPr sz="1400" b="0" i="0" u="none" strike="noStrike" cap="none" dirty="0">
               <a:solidFill>
                 <a:srgbClr val="000000"/>
               </a:solidFill>
@@ -14764,7 +14994,7 @@
               <a:buFont typeface="Arial"/>
               <a:buNone/>
             </a:pPr>
-            <a:endParaRPr sz="1400" b="0" i="0" u="none" strike="noStrike" cap="none">
+            <a:endParaRPr sz="1400" b="0" i="0" u="none" strike="noStrike" cap="none" dirty="0">
               <a:solidFill>
                 <a:srgbClr val="000000"/>
               </a:solidFill>
@@ -14793,7 +15023,7 @@
               <a:buNone/>
             </a:pPr>
             <a:r>
-              <a:rPr lang="en" sz="1400" b="0" i="0" u="none" strike="noStrike" cap="none">
+              <a:rPr lang="en" sz="1400" b="0" i="0" u="none" strike="noStrike" cap="none" dirty="0">
                 <a:solidFill>
                   <a:schemeClr val="dk2"/>
                 </a:solidFill>
@@ -14802,9 +15032,9 @@
                 <a:cs typeface="Arial"/>
                 <a:sym typeface="Arial"/>
               </a:rPr>
-              <a:t>Final validation accuracy:</a:t>
+              <a:t>Final validation accuracy: 91.1428%</a:t>
             </a:r>
-            <a:endParaRPr sz="1400" b="0" i="0" u="none" strike="noStrike" cap="none">
+            <a:endParaRPr sz="1400" b="0" i="0" u="none" strike="noStrike" cap="none" dirty="0">
               <a:solidFill>
                 <a:srgbClr val="000000"/>
               </a:solidFill>
@@ -14863,7 +15093,7 @@
               <a:buNone/>
             </a:pPr>
             <a:r>
-              <a:rPr lang="en" sz="1400" b="0" i="0" u="none" strike="noStrike" cap="none">
+              <a:rPr lang="en" sz="1400" b="0" i="0" u="none" strike="noStrike" cap="none" dirty="0">
                 <a:solidFill>
                   <a:schemeClr val="dk2"/>
                 </a:solidFill>
@@ -14874,7 +15104,7 @@
               </a:rPr>
               <a:t>[Insert accuracy plot here]</a:t>
             </a:r>
-            <a:endParaRPr sz="1400" b="0" i="0" u="none" strike="noStrike" cap="none">
+            <a:endParaRPr sz="1400" b="0" i="0" u="none" strike="noStrike" cap="none" dirty="0">
               <a:solidFill>
                 <a:srgbClr val="000000"/>
               </a:solidFill>
@@ -14886,6 +15116,66 @@
           </a:p>
         </p:txBody>
       </p:sp>
+      <p:pic>
+        <p:nvPicPr>
+          <p:cNvPr id="2" name="Picture 1">
+            <a:extLst>
+              <a:ext uri="{FF2B5EF4-FFF2-40B4-BE49-F238E27FC236}">
+                <a16:creationId xmlns:a16="http://schemas.microsoft.com/office/drawing/2014/main" id="{69A6BED5-0AA9-E34F-993F-07756DC34FFC}"/>
+              </a:ext>
+            </a:extLst>
+          </p:cNvPr>
+          <p:cNvPicPr>
+            <a:picLocks noChangeAspect="1"/>
+          </p:cNvPicPr>
+          <p:nvPr/>
+        </p:nvPicPr>
+        <p:blipFill>
+          <a:blip r:embed="rId3"/>
+          <a:stretch>
+            <a:fillRect/>
+          </a:stretch>
+        </p:blipFill>
+        <p:spPr>
+          <a:xfrm>
+            <a:off x="401053" y="1017360"/>
+            <a:ext cx="3144252" cy="2467364"/>
+          </a:xfrm>
+          <a:prstGeom prst="rect">
+            <a:avLst/>
+          </a:prstGeom>
+        </p:spPr>
+      </p:pic>
+      <p:pic>
+        <p:nvPicPr>
+          <p:cNvPr id="3" name="Picture 2">
+            <a:extLst>
+              <a:ext uri="{FF2B5EF4-FFF2-40B4-BE49-F238E27FC236}">
+                <a16:creationId xmlns:a16="http://schemas.microsoft.com/office/drawing/2014/main" id="{983D5449-7E6B-274B-90ED-EF20A456CFBC}"/>
+              </a:ext>
+            </a:extLst>
+          </p:cNvPr>
+          <p:cNvPicPr>
+            <a:picLocks noChangeAspect="1"/>
+          </p:cNvPicPr>
+          <p:nvPr/>
+        </p:nvPicPr>
+        <p:blipFill>
+          <a:blip r:embed="rId4"/>
+          <a:stretch>
+            <a:fillRect/>
+          </a:stretch>
+        </p:blipFill>
+        <p:spPr>
+          <a:xfrm>
+            <a:off x="4832280" y="1120940"/>
+            <a:ext cx="3708400" cy="2870200"/>
+          </a:xfrm>
+          <a:prstGeom prst="rect">
+            <a:avLst/>
+          </a:prstGeom>
+        </p:spPr>
+      </p:pic>
     </p:spTree>
   </p:cSld>
   <p:clrMapOvr>
@@ -15044,6 +15334,36 @@
           </a:p>
         </p:txBody>
       </p:sp>
+      <p:pic>
+        <p:nvPicPr>
+          <p:cNvPr id="2" name="Picture 1">
+            <a:extLst>
+              <a:ext uri="{FF2B5EF4-FFF2-40B4-BE49-F238E27FC236}">
+                <a16:creationId xmlns:a16="http://schemas.microsoft.com/office/drawing/2014/main" id="{910C3449-38CF-5B40-BD2E-20815F8B93B8}"/>
+              </a:ext>
+            </a:extLst>
+          </p:cNvPr>
+          <p:cNvPicPr>
+            <a:picLocks noChangeAspect="1"/>
+          </p:cNvPicPr>
+          <p:nvPr/>
+        </p:nvPicPr>
+        <p:blipFill>
+          <a:blip r:embed="rId3"/>
+          <a:stretch>
+            <a:fillRect/>
+          </a:stretch>
+        </p:blipFill>
+        <p:spPr>
+          <a:xfrm>
+            <a:off x="379997" y="1803400"/>
+            <a:ext cx="7756533" cy="2187740"/>
+          </a:xfrm>
+          <a:prstGeom prst="rect">
+            <a:avLst/>
+          </a:prstGeom>
+        </p:spPr>
+      </p:pic>
     </p:spTree>
   </p:cSld>
   <p:clrMapOvr>
@@ -15179,7 +15499,7 @@
               <a:buNone/>
             </a:pPr>
             <a:r>
-              <a:rPr lang="en" sz="1400" b="0" i="0" u="none" strike="noStrike" cap="none">
+              <a:rPr lang="en" sz="1400" b="0" i="0" u="none" strike="noStrike" cap="none" dirty="0">
                 <a:solidFill>
                   <a:schemeClr val="dk2"/>
                 </a:solidFill>
@@ -15190,9 +15510,164 @@
               </a:rPr>
               <a:t>[List 3 changes that you made in the network compared to the one in part 3.]</a:t>
             </a:r>
-            <a:endParaRPr sz="1400" b="0" i="0" u="none" strike="noStrike" cap="none">
+          </a:p>
+          <a:p>
+            <a:pPr marL="0" marR="0" lvl="0" indent="0" algn="l" rtl="0">
+              <a:lnSpc>
+                <a:spcPct val="115000"/>
+              </a:lnSpc>
+              <a:spcBef>
+                <a:spcPts val="0"/>
+              </a:spcBef>
+              <a:spcAft>
+                <a:spcPts val="0"/>
+              </a:spcAft>
+              <a:buClr>
+                <a:schemeClr val="dk2"/>
+              </a:buClr>
+              <a:buSzPts val="1400"/>
+              <a:buFont typeface="Arial"/>
+              <a:buNone/>
+            </a:pPr>
+            <a:endParaRPr lang="en" sz="1400" dirty="0">
               <a:solidFill>
-                <a:srgbClr val="000000"/>
+                <a:schemeClr val="dk2"/>
+              </a:solidFill>
+            </a:endParaRPr>
+          </a:p>
+          <a:p>
+            <a:pPr marL="0" marR="0" lvl="0" indent="0" algn="l" rtl="0">
+              <a:lnSpc>
+                <a:spcPct val="115000"/>
+              </a:lnSpc>
+              <a:spcBef>
+                <a:spcPts val="0"/>
+              </a:spcBef>
+              <a:spcAft>
+                <a:spcPts val="0"/>
+              </a:spcAft>
+              <a:buClr>
+                <a:schemeClr val="dk2"/>
+              </a:buClr>
+              <a:buSzPts val="1400"/>
+              <a:buFont typeface="Arial"/>
+              <a:buNone/>
+            </a:pPr>
+            <a:r>
+              <a:rPr lang="en" sz="1400" b="0" i="0" u="none" strike="noStrike" cap="none" dirty="0">
+                <a:solidFill>
+                  <a:schemeClr val="tx1"/>
+                </a:solidFill>
+                <a:latin typeface="Arial"/>
+                <a:ea typeface="Arial"/>
+                <a:cs typeface="Arial"/>
+                <a:sym typeface="Arial"/>
+              </a:rPr>
+              <a:t>The final fully connected layer of this network has 7 output neurons, for the 7 classes / scene attributes instead of 15(in </a:t>
+            </a:r>
+            <a:r>
+              <a:rPr lang="en-IN" sz="1400" dirty="0">
+                <a:solidFill>
+                  <a:schemeClr val="tx1"/>
+                </a:solidFill>
+              </a:rPr>
+              <a:t>the</a:t>
+            </a:r>
+            <a:r>
+              <a:rPr lang="en" sz="1400" b="0" i="0" u="none" strike="noStrike" cap="none" dirty="0">
+                <a:solidFill>
+                  <a:schemeClr val="tx1"/>
+                </a:solidFill>
+                <a:latin typeface="Arial"/>
+                <a:ea typeface="Arial"/>
+                <a:cs typeface="Arial"/>
+                <a:sym typeface="Arial"/>
+              </a:rPr>
+              <a:t> </a:t>
+            </a:r>
+            <a:r>
+              <a:rPr lang="en" sz="1400" b="0" i="0" u="none" strike="noStrike" cap="none" dirty="0" err="1">
+                <a:solidFill>
+                  <a:schemeClr val="tx1"/>
+                </a:solidFill>
+                <a:latin typeface="Arial"/>
+                <a:ea typeface="Arial"/>
+                <a:cs typeface="Arial"/>
+                <a:sym typeface="Arial"/>
+              </a:rPr>
+              <a:t>ResNet</a:t>
+            </a:r>
+            <a:r>
+              <a:rPr lang="en" sz="1400" b="0" i="0" u="none" strike="noStrike" cap="none" dirty="0">
+                <a:solidFill>
+                  <a:schemeClr val="tx1"/>
+                </a:solidFill>
+                <a:latin typeface="Arial"/>
+                <a:ea typeface="Arial"/>
+                <a:cs typeface="Arial"/>
+                <a:sym typeface="Arial"/>
+              </a:rPr>
+              <a:t> from part 3</a:t>
+            </a:r>
+            <a:r>
+              <a:rPr lang="en" sz="1400" dirty="0">
+                <a:solidFill>
+                  <a:schemeClr val="tx1"/>
+                </a:solidFill>
+              </a:rPr>
+              <a:t>). The loss function in this is </a:t>
+            </a:r>
+            <a:r>
+              <a:rPr lang="en" sz="1400" dirty="0" err="1">
+                <a:solidFill>
+                  <a:schemeClr val="tx1"/>
+                </a:solidFill>
+              </a:rPr>
+              <a:t>BCEWithLogitsLoss</a:t>
+            </a:r>
+            <a:r>
+              <a:rPr lang="en" sz="1400" dirty="0">
+                <a:solidFill>
+                  <a:schemeClr val="tx1"/>
+                </a:solidFill>
+              </a:rPr>
+              <a:t>, unlike the Resnet from part 3 which used </a:t>
+            </a:r>
+            <a:r>
+              <a:rPr lang="en" sz="1400" dirty="0" err="1">
+                <a:solidFill>
+                  <a:schemeClr val="tx1"/>
+                </a:solidFill>
+              </a:rPr>
+              <a:t>CrossEntropy</a:t>
+            </a:r>
+            <a:r>
+              <a:rPr lang="en" sz="1400" dirty="0">
+                <a:solidFill>
+                  <a:schemeClr val="tx1"/>
+                </a:solidFill>
+              </a:rPr>
+              <a:t>. We also explicitly use a Sigmoid activation function in Part 4, which is different from the usage of </a:t>
+            </a:r>
+            <a:r>
+              <a:rPr lang="en" sz="1400" dirty="0" err="1">
+                <a:solidFill>
+                  <a:schemeClr val="tx1"/>
+                </a:solidFill>
+              </a:rPr>
+              <a:t>softmax</a:t>
+            </a:r>
+            <a:r>
+              <a:rPr lang="en" sz="1400" dirty="0">
+                <a:solidFill>
+                  <a:schemeClr val="tx1"/>
+                </a:solidFill>
+              </a:rPr>
+              <a:t> in part 3. </a:t>
+            </a:r>
+            <a:endParaRPr sz="1400" b="0" i="0" u="none" strike="noStrike" cap="none" dirty="0">
+              <a:solidFill>
+                <a:schemeClr val="tx1"/>
               </a:solidFill>
               <a:latin typeface="Arial"/>
               <a:ea typeface="Arial"/>
@@ -15249,7 +15724,7 @@
               <a:buNone/>
             </a:pPr>
             <a:r>
-              <a:rPr lang="en" sz="1400" b="0" i="0" u="none" strike="noStrike" cap="none">
+              <a:rPr lang="en" sz="1400" b="0" i="0" u="none" strike="noStrike" cap="none" dirty="0">
                 <a:solidFill>
                   <a:schemeClr val="dk2"/>
                 </a:solidFill>
@@ -15258,16 +15733,175 @@
                 <a:cs typeface="Arial"/>
                 <a:sym typeface="Arial"/>
               </a:rPr>
-              <a:t>[Is the loss function of the ResNet model from part 3 appropriate for this problem? Why or why not?]</a:t>
+              <a:t>[Is the loss function of the </a:t>
             </a:r>
-            <a:endParaRPr sz="1400" b="0" i="0" u="none" strike="noStrike" cap="none">
+            <a:r>
+              <a:rPr lang="en" sz="1400" b="0" i="0" u="none" strike="noStrike" cap="none" dirty="0" err="1">
+                <a:solidFill>
+                  <a:schemeClr val="dk2"/>
+                </a:solidFill>
+                <a:latin typeface="Arial"/>
+                <a:ea typeface="Arial"/>
+                <a:cs typeface="Arial"/>
+                <a:sym typeface="Arial"/>
+              </a:rPr>
+              <a:t>ResNet</a:t>
+            </a:r>
+            <a:r>
+              <a:rPr lang="en" sz="1400" b="0" i="0" u="none" strike="noStrike" cap="none" dirty="0">
+                <a:solidFill>
+                  <a:schemeClr val="dk2"/>
+                </a:solidFill>
+                <a:latin typeface="Arial"/>
+                <a:ea typeface="Arial"/>
+                <a:cs typeface="Arial"/>
+                <a:sym typeface="Arial"/>
+              </a:rPr>
+              <a:t> model from part 3 appropriate for this problem? Why or why not?]</a:t>
+            </a:r>
+          </a:p>
+          <a:p>
+            <a:pPr marL="0" marR="0" lvl="0" indent="0" algn="l" rtl="0">
+              <a:lnSpc>
+                <a:spcPct val="115000"/>
+              </a:lnSpc>
+              <a:spcBef>
+                <a:spcPts val="0"/>
+              </a:spcBef>
+              <a:spcAft>
+                <a:spcPts val="0"/>
+              </a:spcAft>
+              <a:buClr>
+                <a:schemeClr val="dk2"/>
+              </a:buClr>
+              <a:buSzPts val="1400"/>
+              <a:buFont typeface="Arial"/>
+              <a:buNone/>
+            </a:pPr>
+            <a:endParaRPr lang="en" sz="1400" dirty="0">
               <a:solidFill>
                 <a:srgbClr val="000000"/>
               </a:solidFill>
-              <a:latin typeface="Arial"/>
-              <a:ea typeface="Arial"/>
-              <a:cs typeface="Arial"/>
-              <a:sym typeface="Arial"/>
+            </a:endParaRPr>
+          </a:p>
+          <a:p>
+            <a:pPr marL="0" marR="0" lvl="0" indent="0" algn="l" rtl="0">
+              <a:lnSpc>
+                <a:spcPct val="115000"/>
+              </a:lnSpc>
+              <a:spcBef>
+                <a:spcPts val="0"/>
+              </a:spcBef>
+              <a:spcAft>
+                <a:spcPts val="0"/>
+              </a:spcAft>
+              <a:buClr>
+                <a:schemeClr val="dk2"/>
+              </a:buClr>
+              <a:buSzPts val="1400"/>
+              <a:buFont typeface="Arial"/>
+              <a:buNone/>
+            </a:pPr>
+            <a:r>
+              <a:rPr lang="en" sz="1400" dirty="0">
+                <a:solidFill>
+                  <a:srgbClr val="000000"/>
+                </a:solidFill>
+              </a:rPr>
+              <a:t>The cross-entropy loss is used for Multi-class single label classification, where each input point belongs to one class. It effectively uses </a:t>
+            </a:r>
+            <a:r>
+              <a:rPr lang="en" sz="1400" dirty="0" err="1">
+                <a:solidFill>
+                  <a:srgbClr val="000000"/>
+                </a:solidFill>
+              </a:rPr>
+              <a:t>Softmax</a:t>
+            </a:r>
+            <a:r>
+              <a:rPr lang="en" sz="1400" dirty="0">
+                <a:solidFill>
+                  <a:srgbClr val="000000"/>
+                </a:solidFill>
+              </a:rPr>
+              <a:t> to force the probabilities to compete against each other to define one true label. In t</a:t>
+            </a:r>
+            <a:r>
+              <a:rPr lang="en-IN" sz="1400" dirty="0">
+                <a:solidFill>
+                  <a:srgbClr val="000000"/>
+                </a:solidFill>
+              </a:rPr>
+              <a:t>he</a:t>
+            </a:r>
+            <a:r>
+              <a:rPr lang="en" sz="1400" dirty="0">
+                <a:solidFill>
+                  <a:srgbClr val="000000"/>
+                </a:solidFill>
+              </a:rPr>
+              <a:t> case of Part 4, </a:t>
+            </a:r>
+            <a:r>
+              <a:rPr lang="en" sz="1400" dirty="0" err="1">
+                <a:solidFill>
+                  <a:srgbClr val="000000"/>
+                </a:solidFill>
+              </a:rPr>
+              <a:t>CrossEntropy</a:t>
+            </a:r>
+            <a:r>
+              <a:rPr lang="en" sz="1400" dirty="0">
+                <a:solidFill>
+                  <a:srgbClr val="000000"/>
+                </a:solidFill>
+              </a:rPr>
+              <a:t> would </a:t>
+            </a:r>
+            <a:r>
+              <a:rPr lang="en" sz="1400" dirty="0" err="1">
+                <a:solidFill>
+                  <a:srgbClr val="000000"/>
+                </a:solidFill>
+              </a:rPr>
+              <a:t>penali</a:t>
+            </a:r>
+            <a:r>
+              <a:rPr lang="en-IN" sz="1400" dirty="0">
+                <a:solidFill>
+                  <a:srgbClr val="000000"/>
+                </a:solidFill>
+              </a:rPr>
+              <a:t>z</a:t>
+            </a:r>
+            <a:r>
+              <a:rPr lang="en" sz="1400" dirty="0">
+                <a:solidFill>
+                  <a:srgbClr val="000000"/>
+                </a:solidFill>
+              </a:rPr>
+              <a:t>e the model for predicting high probabilities for multiple attributes, which is something we don’t want. That’s why </a:t>
+            </a:r>
+            <a:r>
+              <a:rPr lang="en" sz="1400" dirty="0" err="1">
+                <a:solidFill>
+                  <a:srgbClr val="000000"/>
+                </a:solidFill>
+              </a:rPr>
+              <a:t>BCEWithLogitsLoss</a:t>
+            </a:r>
+            <a:r>
+              <a:rPr lang="en" sz="1400" dirty="0">
+                <a:solidFill>
+                  <a:srgbClr val="000000"/>
+                </a:solidFill>
+              </a:rPr>
+              <a:t> is better, since it treats the 7 attribute predictions independently allowing any number of them to be true for a single input image. </a:t>
+            </a:r>
+            <a:endParaRPr lang="en" sz="1400" dirty="0">
+              <a:solidFill>
+                <a:schemeClr val="dk2"/>
+              </a:solidFill>
             </a:endParaRPr>
           </a:p>
         </p:txBody>
@@ -15418,7 +16052,50 @@
               </a:rPr>
               <a:t>[Explain a problem that one needs to be wary of with multilabel classification. HINT: consider the purpose of visualizing your results with the accuracy table. You might want to do some data exploration here.]</a:t>
             </a:r>
-            <a:endParaRPr sz="1400" b="0" i="0" u="none" strike="noStrike" cap="none" dirty="0">
+          </a:p>
+          <a:p>
+            <a:pPr marL="0" marR="0" lvl="0" indent="0" algn="l" rtl="0">
+              <a:lnSpc>
+                <a:spcPct val="115000"/>
+              </a:lnSpc>
+              <a:spcBef>
+                <a:spcPts val="0"/>
+              </a:spcBef>
+              <a:spcAft>
+                <a:spcPts val="0"/>
+              </a:spcAft>
+              <a:buClr>
+                <a:schemeClr val="dk2"/>
+              </a:buClr>
+              <a:buSzPts val="1400"/>
+              <a:buFont typeface="Arial"/>
+              <a:buNone/>
+            </a:pPr>
+            <a:endParaRPr lang="en" sz="1400" dirty="0">
+              <a:solidFill>
+                <a:schemeClr val="dk2"/>
+              </a:solidFill>
+            </a:endParaRPr>
+          </a:p>
+          <a:p>
+            <a:pPr marL="0" lvl="0" indent="0">
+              <a:lnSpc>
+                <a:spcPct val="115000"/>
+              </a:lnSpc>
+              <a:spcBef>
+                <a:spcPts val="0"/>
+              </a:spcBef>
+              <a:buClr>
+                <a:schemeClr val="dk2"/>
+              </a:buClr>
+              <a:buSzPts val="1400"/>
+              <a:buNone/>
+            </a:pPr>
+            <a:r>
+              <a:rPr lang="en-IN" sz="1200" dirty="0"/>
+              <a:t>A major problem to be wary of with multi-label classification is dataset imbalance, where some attributes are far more frequent than others. Data exploration of our training set confirms this, showing that the 'natural' attribute appears in 833 images, while the 'animals' attribute is present in only 31. This imbalance can be deceptive because a model can achieve high accuracy on a rare attribute like 'animals' (99%) simply by learning to almost always predict its absence. A high overall validation accuracy, such as our 92%, is completely hiding this flaw, which is why the per-attribute accuracy table is essential for true performance analysis. The table also reveals that imbalance isn't the only factor, as our model struggled most with clouds (79%) despite it being a common attribute, indicating it was also visually challenging. Therefore, we must be wary of class imbalance because it can create a false sense of high performance, a problem that can only be diagnosed with detailed tools like the accuracy table.</a:t>
+            </a:r>
+            <a:endParaRPr sz="1200" b="0" i="0" u="none" strike="noStrike" cap="none" dirty="0">
               <a:solidFill>
                 <a:srgbClr val="000000"/>
               </a:solidFill>
@@ -15572,7 +16249,7 @@
               <a:buNone/>
             </a:pPr>
             <a:r>
-              <a:rPr lang="en" sz="1800" b="0" i="0" u="none" strike="noStrike" cap="none">
+              <a:rPr lang="en" sz="1800" b="0" i="0" u="none" strike="noStrike" cap="none" dirty="0">
                 <a:solidFill>
                   <a:schemeClr val="dk2"/>
                 </a:solidFill>
@@ -15583,7 +16260,7 @@
               </a:rPr>
               <a:t>[Discuss what extra credit you did and provide analyses.]</a:t>
             </a:r>
-            <a:endParaRPr sz="1800" b="0" i="0" u="none" strike="noStrike" cap="none">
+            <a:endParaRPr sz="1800" b="0" i="0" u="none" strike="noStrike" cap="none" dirty="0">
               <a:solidFill>
                 <a:srgbClr val="000000"/>
               </a:solidFill>
@@ -15702,8 +16379,8 @@
         </p:nvSpPr>
         <p:spPr>
           <a:xfrm>
-            <a:off x="311760" y="1152360"/>
-            <a:ext cx="3999600" cy="3416040"/>
+            <a:off x="311760" y="954505"/>
+            <a:ext cx="3999600" cy="3613895"/>
           </a:xfrm>
           <a:prstGeom prst="rect">
             <a:avLst/>
@@ -15737,7 +16414,7 @@
               <a:buNone/>
             </a:pPr>
             <a:r>
-              <a:rPr lang="en" sz="1400" b="0" i="0" u="none" strike="noStrike" cap="none">
+              <a:rPr lang="en" sz="1400" b="0" i="0" u="none" strike="noStrike" cap="none" dirty="0">
                 <a:solidFill>
                   <a:schemeClr val="dk2"/>
                 </a:solidFill>
@@ -15746,9 +16423,33 @@
                 <a:cs typeface="Arial"/>
                 <a:sym typeface="Arial"/>
               </a:rPr>
-              <a:t>[Insert loss plot for SimpleNet here]</a:t>
+              <a:t>[Insert loss plot for </a:t>
             </a:r>
-            <a:endParaRPr sz="1400" b="0" i="0" u="none" strike="noStrike" cap="none">
+            <a:r>
+              <a:rPr lang="en" sz="1400" b="0" i="0" u="none" strike="noStrike" cap="none" dirty="0" err="1">
+                <a:solidFill>
+                  <a:schemeClr val="dk2"/>
+                </a:solidFill>
+                <a:latin typeface="Arial"/>
+                <a:ea typeface="Arial"/>
+                <a:cs typeface="Arial"/>
+                <a:sym typeface="Arial"/>
+              </a:rPr>
+              <a:t>SimpleNet</a:t>
+            </a:r>
+            <a:r>
+              <a:rPr lang="en" sz="1400" b="0" i="0" u="none" strike="noStrike" cap="none" dirty="0">
+                <a:solidFill>
+                  <a:schemeClr val="dk2"/>
+                </a:solidFill>
+                <a:latin typeface="Arial"/>
+                <a:ea typeface="Arial"/>
+                <a:cs typeface="Arial"/>
+                <a:sym typeface="Arial"/>
+              </a:rPr>
+              <a:t> here]</a:t>
+            </a:r>
+            <a:endParaRPr sz="1400" b="0" i="0" u="none" strike="noStrike" cap="none" dirty="0">
               <a:solidFill>
                 <a:srgbClr val="000000"/>
               </a:solidFill>
@@ -15776,7 +16477,7 @@
               <a:buFont typeface="Arial"/>
               <a:buNone/>
             </a:pPr>
-            <a:endParaRPr sz="1400" b="0" i="0" u="none" strike="noStrike" cap="none">
+            <a:endParaRPr sz="1400" b="0" i="0" u="none" strike="noStrike" cap="none" dirty="0">
               <a:solidFill>
                 <a:srgbClr val="000000"/>
               </a:solidFill>
@@ -15804,7 +16505,7 @@
               <a:buFont typeface="Arial"/>
               <a:buNone/>
             </a:pPr>
-            <a:endParaRPr sz="1400" b="0" i="0" u="none" strike="noStrike" cap="none">
+            <a:endParaRPr sz="1400" b="0" i="0" u="none" strike="noStrike" cap="none" dirty="0">
               <a:solidFill>
                 <a:srgbClr val="000000"/>
               </a:solidFill>
@@ -15832,7 +16533,7 @@
               <a:buFont typeface="Arial"/>
               <a:buNone/>
             </a:pPr>
-            <a:endParaRPr sz="1400" b="0" i="0" u="none" strike="noStrike" cap="none">
+            <a:endParaRPr sz="1400" b="0" i="0" u="none" strike="noStrike" cap="none" dirty="0">
               <a:solidFill>
                 <a:srgbClr val="000000"/>
               </a:solidFill>
@@ -15860,7 +16561,7 @@
               <a:buFont typeface="Arial"/>
               <a:buNone/>
             </a:pPr>
-            <a:endParaRPr sz="1400" b="0" i="0" u="none" strike="noStrike" cap="none">
+            <a:endParaRPr sz="1400" b="0" i="0" u="none" strike="noStrike" cap="none" dirty="0">
               <a:solidFill>
                 <a:srgbClr val="000000"/>
               </a:solidFill>
@@ -15888,7 +16589,7 @@
               <a:buFont typeface="Arial"/>
               <a:buNone/>
             </a:pPr>
-            <a:endParaRPr sz="1400" b="0" i="0" u="none" strike="noStrike" cap="none">
+            <a:endParaRPr sz="1400" b="0" i="0" u="none" strike="noStrike" cap="none" dirty="0">
               <a:solidFill>
                 <a:srgbClr val="000000"/>
               </a:solidFill>
@@ -15916,7 +16617,7 @@
               <a:buFont typeface="Arial"/>
               <a:buNone/>
             </a:pPr>
-            <a:endParaRPr sz="1400" b="0" i="0" u="none" strike="noStrike" cap="none">
+            <a:endParaRPr sz="1400" b="0" i="0" u="none" strike="noStrike" cap="none" dirty="0">
               <a:solidFill>
                 <a:srgbClr val="000000"/>
               </a:solidFill>
@@ -15944,7 +16645,7 @@
               <a:buFont typeface="Arial"/>
               <a:buNone/>
             </a:pPr>
-            <a:endParaRPr sz="1400" b="0" i="0" u="none" strike="noStrike" cap="none">
+            <a:endParaRPr sz="1400" b="0" i="0" u="none" strike="noStrike" cap="none" dirty="0">
               <a:solidFill>
                 <a:srgbClr val="000000"/>
               </a:solidFill>
@@ -15972,7 +16673,7 @@
               <a:buFont typeface="Arial"/>
               <a:buNone/>
             </a:pPr>
-            <a:endParaRPr sz="1400" b="0" i="0" u="none" strike="noStrike" cap="none">
+            <a:endParaRPr sz="1400" b="0" i="0" u="none" strike="noStrike" cap="none" dirty="0">
               <a:solidFill>
                 <a:srgbClr val="000000"/>
               </a:solidFill>
@@ -16000,7 +16701,7 @@
               <a:buFont typeface="Arial"/>
               <a:buNone/>
             </a:pPr>
-            <a:endParaRPr sz="1400" b="0" i="0" u="none" strike="noStrike" cap="none">
+            <a:endParaRPr sz="1400" b="0" i="0" u="none" strike="noStrike" cap="none" dirty="0">
               <a:solidFill>
                 <a:srgbClr val="000000"/>
               </a:solidFill>
@@ -16029,7 +16730,7 @@
               <a:buNone/>
             </a:pPr>
             <a:r>
-              <a:rPr lang="en" sz="1400" b="0" i="0" u="none" strike="noStrike" cap="none">
+              <a:rPr lang="en" sz="1400" b="0" i="0" u="none" strike="noStrike" cap="none" dirty="0">
                 <a:solidFill>
                   <a:schemeClr val="dk2"/>
                 </a:solidFill>
@@ -16038,9 +16739,9 @@
                 <a:cs typeface="Arial"/>
                 <a:sym typeface="Arial"/>
               </a:rPr>
-              <a:t>Final training accuracy:</a:t>
+              <a:t>Final training accuracy: 64.288%</a:t>
             </a:r>
-            <a:endParaRPr sz="1400" b="0" i="0" u="none" strike="noStrike" cap="none">
+            <a:endParaRPr sz="1400" b="0" i="0" u="none" strike="noStrike" cap="none" dirty="0">
               <a:solidFill>
                 <a:srgbClr val="000000"/>
               </a:solidFill>
@@ -16068,7 +16769,7 @@
               <a:buFont typeface="Arial"/>
               <a:buNone/>
             </a:pPr>
-            <a:endParaRPr sz="1400" b="0" i="0" u="none" strike="noStrike" cap="none">
+            <a:endParaRPr sz="1400" b="0" i="0" u="none" strike="noStrike" cap="none" dirty="0">
               <a:solidFill>
                 <a:srgbClr val="000000"/>
               </a:solidFill>
@@ -16097,7 +16798,7 @@
               <a:buNone/>
             </a:pPr>
             <a:r>
-              <a:rPr lang="en" sz="1400" b="0" i="0" u="none" strike="noStrike" cap="none">
+              <a:rPr lang="en" sz="1400" b="0" i="0" u="none" strike="noStrike" cap="none" dirty="0">
                 <a:solidFill>
                   <a:schemeClr val="dk2"/>
                 </a:solidFill>
@@ -16106,9 +16807,9 @@
                 <a:cs typeface="Arial"/>
                 <a:sym typeface="Arial"/>
               </a:rPr>
-              <a:t>Final validation accuracy:</a:t>
+              <a:t>Final validation accuracy: 48.933%</a:t>
             </a:r>
-            <a:endParaRPr sz="1400" b="0" i="0" u="none" strike="noStrike" cap="none">
+            <a:endParaRPr sz="1400" b="0" i="0" u="none" strike="noStrike" cap="none" dirty="0">
               <a:solidFill>
                 <a:srgbClr val="000000"/>
               </a:solidFill>
@@ -16190,6 +16891,66 @@
           </a:p>
         </p:txBody>
       </p:sp>
+      <p:pic>
+        <p:nvPicPr>
+          <p:cNvPr id="2" name="Picture 1">
+            <a:extLst>
+              <a:ext uri="{FF2B5EF4-FFF2-40B4-BE49-F238E27FC236}">
+                <a16:creationId xmlns:a16="http://schemas.microsoft.com/office/drawing/2014/main" id="{023AB0A8-AC93-CC49-9093-298428D38D16}"/>
+              </a:ext>
+            </a:extLst>
+          </p:cNvPr>
+          <p:cNvPicPr>
+            <a:picLocks noChangeAspect="1"/>
+          </p:cNvPicPr>
+          <p:nvPr/>
+        </p:nvPicPr>
+        <p:blipFill>
+          <a:blip r:embed="rId3"/>
+          <a:stretch>
+            <a:fillRect/>
+          </a:stretch>
+        </p:blipFill>
+        <p:spPr>
+          <a:xfrm>
+            <a:off x="311760" y="1425280"/>
+            <a:ext cx="2543148" cy="2023773"/>
+          </a:xfrm>
+          <a:prstGeom prst="rect">
+            <a:avLst/>
+          </a:prstGeom>
+        </p:spPr>
+      </p:pic>
+      <p:pic>
+        <p:nvPicPr>
+          <p:cNvPr id="3" name="Picture 2">
+            <a:extLst>
+              <a:ext uri="{FF2B5EF4-FFF2-40B4-BE49-F238E27FC236}">
+                <a16:creationId xmlns:a16="http://schemas.microsoft.com/office/drawing/2014/main" id="{4E2F2536-D1A3-244A-A736-108F4325B53B}"/>
+              </a:ext>
+            </a:extLst>
+          </p:cNvPr>
+          <p:cNvPicPr>
+            <a:picLocks noChangeAspect="1"/>
+          </p:cNvPicPr>
+          <p:nvPr/>
+        </p:nvPicPr>
+        <p:blipFill>
+          <a:blip r:embed="rId4"/>
+          <a:stretch>
+            <a:fillRect/>
+          </a:stretch>
+        </p:blipFill>
+        <p:spPr>
+          <a:xfrm>
+            <a:off x="4571820" y="1643930"/>
+            <a:ext cx="3606800" cy="2870200"/>
+          </a:xfrm>
+          <a:prstGeom prst="rect">
+            <a:avLst/>
+          </a:prstGeom>
+        </p:spPr>
+      </p:pic>
     </p:spTree>
   </p:cSld>
   <p:clrMapOvr>
@@ -16332,7 +17093,7 @@
               <a:buNone/>
             </a:pPr>
             <a:r>
-              <a:rPr lang="en" sz="1800" b="0" i="0" u="none" strike="noStrike" cap="none">
+              <a:rPr lang="en" sz="1800" b="0" i="0" u="none" strike="noStrike" cap="none" dirty="0">
                 <a:solidFill>
                   <a:schemeClr val="dk2"/>
                 </a:solidFill>
@@ -16343,7 +17104,7 @@
               </a:rPr>
               <a:t>Add each of the following (keeping the changes as you move to the next row):</a:t>
             </a:r>
-            <a:endParaRPr sz="1800" b="0" i="0" u="none" strike="noStrike" cap="none">
+            <a:endParaRPr sz="1800" b="0" i="0" u="none" strike="noStrike" cap="none" dirty="0">
               <a:solidFill>
                 <a:srgbClr val="000000"/>
               </a:solidFill>
@@ -16359,7 +17120,13 @@
         <p:nvGraphicFramePr>
           <p:cNvPr id="96" name="Google Shape;96;p21"/>
           <p:cNvGraphicFramePr/>
-          <p:nvPr/>
+          <p:nvPr>
+            <p:extLst>
+              <p:ext uri="{D42A27DB-BD31-4B8C-83A1-F6EECF244321}">
+                <p14:modId xmlns:p14="http://schemas.microsoft.com/office/powerpoint/2010/main" val="2682432251"/>
+              </p:ext>
+            </p:extLst>
+          </p:nvPr>
         </p:nvGraphicFramePr>
         <p:xfrm>
           <a:off x="1239480" y="1693440"/>
@@ -16410,7 +17177,7 @@
                         </a:spcAft>
                         <a:buNone/>
                       </a:pPr>
-                      <a:endParaRPr sz="1400" b="0" strike="noStrike">
+                      <a:endParaRPr sz="1400" b="0" strike="noStrike" dirty="0">
                         <a:solidFill>
                           <a:srgbClr val="000000"/>
                         </a:solidFill>
@@ -16643,7 +17410,7 @@
                         <a:buNone/>
                       </a:pPr>
                       <a:r>
-                        <a:rPr lang="en" sz="1400" b="0" strike="noStrike">
+                        <a:rPr lang="en" sz="1400" b="0" strike="noStrike" dirty="0" err="1">
                           <a:solidFill>
                             <a:srgbClr val="000000"/>
                           </a:solidFill>
@@ -16654,7 +17421,7 @@
                         </a:rPr>
                         <a:t>SimpleNet</a:t>
                       </a:r>
-                      <a:endParaRPr sz="1400" b="0" strike="noStrike">
+                      <a:endParaRPr sz="1400" b="0" strike="noStrike" dirty="0">
                         <a:solidFill>
                           <a:srgbClr val="000000"/>
                         </a:solidFill>
@@ -16709,16 +17476,38 @@
                     <a:bodyPr/>
                     <a:lstStyle/>
                     <a:p>
-                      <a:pPr marL="0" marR="0" lvl="0" indent="0" algn="l" rtl="0">
+                      <a:pPr marL="0" marR="0" lvl="0" indent="0" algn="l" defTabSz="914400" rtl="0" eaLnBrk="1" fontAlgn="auto" latinLnBrk="0" hangingPunct="1">
+                        <a:lnSpc>
+                          <a:spcPct val="100000"/>
+                        </a:lnSpc>
                         <a:spcBef>
                           <a:spcPts val="0"/>
                         </a:spcBef>
                         <a:spcAft>
                           <a:spcPts val="0"/>
                         </a:spcAft>
+                        <a:buClr>
+                          <a:srgbClr val="000000"/>
+                        </a:buClr>
+                        <a:buSzTx/>
+                        <a:buFont typeface="Arial"/>
                         <a:buNone/>
+                        <a:tabLst/>
+                        <a:defRPr/>
                       </a:pPr>
-                      <a:endParaRPr sz="1400" b="0" strike="noStrike">
+                      <a:r>
+                        <a:rPr lang="en" sz="1400" b="0" i="0" u="none" strike="noStrike" cap="none" dirty="0">
+                          <a:solidFill>
+                            <a:schemeClr val="dk2"/>
+                          </a:solidFill>
+                          <a:latin typeface="Arial"/>
+                          <a:ea typeface="Arial"/>
+                          <a:cs typeface="Arial"/>
+                          <a:sym typeface="Arial"/>
+                        </a:rPr>
+                        <a:t>64.29%</a:t>
+                      </a:r>
+                      <a:endParaRPr lang="en" sz="1400" b="0" i="0" u="none" strike="noStrike" cap="none" dirty="0">
                         <a:solidFill>
                           <a:srgbClr val="000000"/>
                         </a:solidFill>
@@ -16773,16 +17562,38 @@
                     <a:bodyPr/>
                     <a:lstStyle/>
                     <a:p>
-                      <a:pPr marL="0" marR="0" lvl="0" indent="0" algn="l" rtl="0">
+                      <a:pPr marL="0" marR="0" lvl="0" indent="0" algn="l" defTabSz="914400" rtl="0" eaLnBrk="1" fontAlgn="auto" latinLnBrk="0" hangingPunct="1">
+                        <a:lnSpc>
+                          <a:spcPct val="100000"/>
+                        </a:lnSpc>
                         <a:spcBef>
                           <a:spcPts val="0"/>
                         </a:spcBef>
                         <a:spcAft>
                           <a:spcPts val="0"/>
                         </a:spcAft>
+                        <a:buClr>
+                          <a:srgbClr val="000000"/>
+                        </a:buClr>
+                        <a:buSzTx/>
+                        <a:buFont typeface="Arial"/>
                         <a:buNone/>
+                        <a:tabLst/>
+                        <a:defRPr/>
                       </a:pPr>
-                      <a:endParaRPr sz="1400" b="0" strike="noStrike">
+                      <a:r>
+                        <a:rPr lang="en" sz="1400" b="0" i="0" u="none" strike="noStrike" cap="none" dirty="0">
+                          <a:solidFill>
+                            <a:schemeClr val="dk2"/>
+                          </a:solidFill>
+                          <a:latin typeface="Arial"/>
+                          <a:ea typeface="Arial"/>
+                          <a:cs typeface="Arial"/>
+                          <a:sym typeface="Arial"/>
+                        </a:rPr>
+                        <a:t>48.93%</a:t>
+                      </a:r>
+                      <a:endParaRPr lang="en" sz="1400" b="0" i="0" u="none" strike="noStrike" cap="none" dirty="0">
                         <a:solidFill>
                           <a:srgbClr val="000000"/>
                         </a:solidFill>
@@ -16862,7 +17673,7 @@
                         <a:buChar char="+"/>
                       </a:pPr>
                       <a:r>
-                        <a:rPr lang="en" sz="1400" b="0" strike="noStrike">
+                        <a:rPr lang="en" sz="1400" b="0" strike="noStrike" dirty="0">
                           <a:solidFill>
                             <a:srgbClr val="000000"/>
                           </a:solidFill>
@@ -16873,7 +17684,7 @@
                         </a:rPr>
                         <a:t>Jittering</a:t>
                       </a:r>
-                      <a:endParaRPr sz="1400" b="0" strike="noStrike">
+                      <a:endParaRPr sz="1400" b="0" strike="noStrike" dirty="0">
                         <a:solidFill>
                           <a:srgbClr val="000000"/>
                         </a:solidFill>
@@ -16937,7 +17748,19 @@
                         </a:spcAft>
                         <a:buNone/>
                       </a:pPr>
-                      <a:endParaRPr sz="1400" b="0" strike="noStrike">
+                      <a:r>
+                        <a:rPr lang="en-US" sz="1400" b="0" strike="noStrike" dirty="0">
+                          <a:solidFill>
+                            <a:srgbClr val="000000"/>
+                          </a:solidFill>
+                          <a:latin typeface="Arial"/>
+                          <a:ea typeface="Arial"/>
+                          <a:cs typeface="Arial"/>
+                          <a:sym typeface="Arial"/>
+                        </a:rPr>
+                        <a:t>58.19%</a:t>
+                      </a:r>
+                      <a:endParaRPr sz="1400" b="0" strike="noStrike" dirty="0">
                         <a:solidFill>
                           <a:srgbClr val="000000"/>
                         </a:solidFill>
@@ -17001,7 +17824,19 @@
                         </a:spcAft>
                         <a:buNone/>
                       </a:pPr>
-                      <a:endParaRPr sz="1400" b="0" strike="noStrike">
+                      <a:r>
+                        <a:rPr lang="en-US" sz="1400" b="0" strike="noStrike" dirty="0">
+                          <a:solidFill>
+                            <a:srgbClr val="000000"/>
+                          </a:solidFill>
+                          <a:latin typeface="Arial"/>
+                          <a:ea typeface="Arial"/>
+                          <a:cs typeface="Arial"/>
+                          <a:sym typeface="Arial"/>
+                        </a:rPr>
+                        <a:t>51.87%</a:t>
+                      </a:r>
+                      <a:endParaRPr sz="1400" b="0" strike="noStrike" dirty="0">
                         <a:solidFill>
                           <a:srgbClr val="000000"/>
                         </a:solidFill>
@@ -17081,7 +17916,7 @@
                         <a:buChar char="+"/>
                       </a:pPr>
                       <a:r>
-                        <a:rPr lang="en" sz="1400" b="0" strike="noStrike">
+                        <a:rPr lang="en" sz="1400" b="0" strike="noStrike" dirty="0">
                           <a:solidFill>
                             <a:srgbClr val="000000"/>
                           </a:solidFill>
@@ -17092,7 +17927,7 @@
                         </a:rPr>
                         <a:t>Zero-centering &amp; variance-normalization</a:t>
                       </a:r>
-                      <a:endParaRPr sz="1400" b="0" strike="noStrike">
+                      <a:endParaRPr sz="1400" b="0" strike="noStrike" dirty="0">
                         <a:solidFill>
                           <a:srgbClr val="000000"/>
                         </a:solidFill>
@@ -17156,7 +17991,19 @@
                         </a:spcAft>
                         <a:buNone/>
                       </a:pPr>
-                      <a:endParaRPr sz="1400" b="0" strike="noStrike">
+                      <a:r>
+                        <a:rPr lang="en-US" sz="1400" b="0" strike="noStrike" dirty="0">
+                          <a:solidFill>
+                            <a:srgbClr val="000000"/>
+                          </a:solidFill>
+                          <a:latin typeface="Arial"/>
+                          <a:ea typeface="Arial"/>
+                          <a:cs typeface="Arial"/>
+                          <a:sym typeface="Arial"/>
+                        </a:rPr>
+                        <a:t>74.67%</a:t>
+                      </a:r>
+                      <a:endParaRPr sz="1400" b="0" strike="noStrike" dirty="0">
                         <a:solidFill>
                           <a:srgbClr val="000000"/>
                         </a:solidFill>
@@ -17220,7 +18067,19 @@
                         </a:spcAft>
                         <a:buNone/>
                       </a:pPr>
-                      <a:endParaRPr sz="1400" b="0" strike="noStrike">
+                      <a:r>
+                        <a:rPr lang="en-US" sz="1400" b="0" strike="noStrike" dirty="0">
+                          <a:solidFill>
+                            <a:srgbClr val="000000"/>
+                          </a:solidFill>
+                          <a:latin typeface="Arial"/>
+                          <a:ea typeface="Arial"/>
+                          <a:cs typeface="Arial"/>
+                          <a:sym typeface="Arial"/>
+                        </a:rPr>
+                        <a:t>56.53%</a:t>
+                      </a:r>
+                      <a:endParaRPr sz="1400" b="0" strike="noStrike" dirty="0">
                         <a:solidFill>
                           <a:srgbClr val="000000"/>
                         </a:solidFill>
@@ -17300,7 +18159,7 @@
                         <a:buChar char="+"/>
                       </a:pPr>
                       <a:r>
-                        <a:rPr lang="en" sz="1400" b="0" strike="noStrike">
+                        <a:rPr lang="en" sz="1400" b="0" strike="noStrike" dirty="0">
                           <a:solidFill>
                             <a:srgbClr val="000000"/>
                           </a:solidFill>
@@ -17311,7 +18170,7 @@
                         </a:rPr>
                         <a:t>Dropout regularization</a:t>
                       </a:r>
-                      <a:endParaRPr sz="1400" b="0" strike="noStrike">
+                      <a:endParaRPr sz="1400" b="0" strike="noStrike" dirty="0">
                         <a:solidFill>
                           <a:srgbClr val="000000"/>
                         </a:solidFill>
@@ -17375,7 +18234,19 @@
                         </a:spcAft>
                         <a:buNone/>
                       </a:pPr>
-                      <a:endParaRPr sz="1400" b="0" strike="noStrike">
+                      <a:r>
+                        <a:rPr lang="en-US" sz="1400" b="0" strike="noStrike" dirty="0">
+                          <a:solidFill>
+                            <a:srgbClr val="000000"/>
+                          </a:solidFill>
+                          <a:latin typeface="Arial"/>
+                          <a:ea typeface="Arial"/>
+                          <a:cs typeface="Arial"/>
+                          <a:sym typeface="Arial"/>
+                        </a:rPr>
+                        <a:t>67.44%</a:t>
+                      </a:r>
+                      <a:endParaRPr sz="1400" b="0" strike="noStrike" dirty="0">
                         <a:solidFill>
                           <a:srgbClr val="000000"/>
                         </a:solidFill>
@@ -17439,7 +18310,19 @@
                         </a:spcAft>
                         <a:buNone/>
                       </a:pPr>
-                      <a:endParaRPr sz="1400" b="0" strike="noStrike">
+                      <a:r>
+                        <a:rPr lang="en-US" sz="1400" b="0" strike="noStrike" dirty="0">
+                          <a:solidFill>
+                            <a:srgbClr val="000000"/>
+                          </a:solidFill>
+                          <a:latin typeface="Arial"/>
+                          <a:ea typeface="Arial"/>
+                          <a:cs typeface="Arial"/>
+                          <a:sym typeface="Arial"/>
+                        </a:rPr>
+                        <a:t>54.00%</a:t>
+                      </a:r>
+                      <a:endParaRPr sz="1400" b="0" strike="noStrike" dirty="0">
                         <a:solidFill>
                           <a:srgbClr val="000000"/>
                         </a:solidFill>
@@ -17519,7 +18402,7 @@
                         <a:buChar char="+"/>
                       </a:pPr>
                       <a:r>
-                        <a:rPr lang="en" sz="1400" b="0" strike="noStrike">
+                        <a:rPr lang="en" sz="1400" b="0" strike="noStrike" dirty="0">
                           <a:solidFill>
                             <a:srgbClr val="000000"/>
                           </a:solidFill>
@@ -17530,7 +18413,7 @@
                         </a:rPr>
                         <a:t>Making network "deep"</a:t>
                       </a:r>
-                      <a:endParaRPr sz="1400" b="0" strike="noStrike">
+                      <a:endParaRPr sz="1400" b="0" strike="noStrike" dirty="0">
                         <a:solidFill>
                           <a:srgbClr val="000000"/>
                         </a:solidFill>
@@ -17594,7 +18477,19 @@
                         </a:spcAft>
                         <a:buNone/>
                       </a:pPr>
-                      <a:endParaRPr sz="1400" b="0" strike="noStrike">
+                      <a:r>
+                        <a:rPr lang="en-US" sz="1400" b="0" strike="noStrike" dirty="0">
+                          <a:solidFill>
+                            <a:srgbClr val="000000"/>
+                          </a:solidFill>
+                          <a:latin typeface="Arial"/>
+                          <a:ea typeface="Arial"/>
+                          <a:cs typeface="Arial"/>
+                          <a:sym typeface="Arial"/>
+                        </a:rPr>
+                        <a:t>61.31%</a:t>
+                      </a:r>
+                      <a:endParaRPr sz="1400" b="0" strike="noStrike" dirty="0">
                         <a:solidFill>
                           <a:srgbClr val="000000"/>
                         </a:solidFill>
@@ -17658,7 +18553,19 @@
                         </a:spcAft>
                         <a:buNone/>
                       </a:pPr>
-                      <a:endParaRPr sz="1400" b="0" strike="noStrike">
+                      <a:r>
+                        <a:rPr lang="en-US" sz="1400" b="0" strike="noStrike" dirty="0">
+                          <a:solidFill>
+                            <a:srgbClr val="000000"/>
+                          </a:solidFill>
+                          <a:latin typeface="Arial"/>
+                          <a:ea typeface="Arial"/>
+                          <a:cs typeface="Arial"/>
+                          <a:sym typeface="Arial"/>
+                        </a:rPr>
+                        <a:t>54.93%</a:t>
+                      </a:r>
+                      <a:endParaRPr sz="1400" b="0" strike="noStrike" dirty="0">
                         <a:solidFill>
                           <a:srgbClr val="000000"/>
                         </a:solidFill>
@@ -17738,7 +18645,7 @@
                         <a:buChar char="+"/>
                       </a:pPr>
                       <a:r>
-                        <a:rPr lang="en" sz="1400" b="0" strike="noStrike">
+                        <a:rPr lang="en" sz="1400" b="0" strike="noStrike" dirty="0">
                           <a:solidFill>
                             <a:srgbClr val="000000"/>
                           </a:solidFill>
@@ -17749,7 +18656,7 @@
                         </a:rPr>
                         <a:t>Batch normalization</a:t>
                       </a:r>
-                      <a:endParaRPr sz="1400" b="0" strike="noStrike">
+                      <a:endParaRPr sz="1400" b="0" strike="noStrike" dirty="0">
                         <a:solidFill>
                           <a:srgbClr val="000000"/>
                         </a:solidFill>
@@ -17813,7 +18720,19 @@
                         </a:spcAft>
                         <a:buNone/>
                       </a:pPr>
-                      <a:endParaRPr sz="1400" b="0" strike="noStrike">
+                      <a:r>
+                        <a:rPr lang="en-US" sz="1400" b="0" strike="noStrike" dirty="0">
+                          <a:solidFill>
+                            <a:srgbClr val="000000"/>
+                          </a:solidFill>
+                          <a:latin typeface="Arial"/>
+                          <a:ea typeface="Arial"/>
+                          <a:cs typeface="Arial"/>
+                          <a:sym typeface="Arial"/>
+                        </a:rPr>
+                        <a:t>60.33%</a:t>
+                      </a:r>
+                      <a:endParaRPr sz="1400" b="0" strike="noStrike" dirty="0">
                         <a:solidFill>
                           <a:srgbClr val="000000"/>
                         </a:solidFill>
@@ -17877,7 +18796,19 @@
                         </a:spcAft>
                         <a:buNone/>
                       </a:pPr>
-                      <a:endParaRPr sz="1400" b="0" strike="noStrike">
+                      <a:r>
+                        <a:rPr lang="en-US" sz="1400" b="0" strike="noStrike" dirty="0">
+                          <a:solidFill>
+                            <a:srgbClr val="000000"/>
+                          </a:solidFill>
+                          <a:latin typeface="Arial"/>
+                          <a:ea typeface="Arial"/>
+                          <a:cs typeface="Arial"/>
+                          <a:sym typeface="Arial"/>
+                        </a:rPr>
+                        <a:t>61.2%</a:t>
+                      </a:r>
+                      <a:endParaRPr sz="1400" b="0" strike="noStrike" dirty="0">
                         <a:solidFill>
                           <a:srgbClr val="000000"/>
                         </a:solidFill>
@@ -18044,8 +18975,8 @@
         </p:nvSpPr>
         <p:spPr>
           <a:xfrm>
-            <a:off x="311760" y="1152360"/>
-            <a:ext cx="3999600" cy="3416040"/>
+            <a:off x="311760" y="1017360"/>
+            <a:ext cx="3999600" cy="3551040"/>
           </a:xfrm>
           <a:prstGeom prst="rect">
             <a:avLst/>
@@ -18079,7 +19010,7 @@
               <a:buNone/>
             </a:pPr>
             <a:r>
-              <a:rPr lang="en" sz="1400" b="0" i="0" u="none" strike="noStrike" cap="none">
+              <a:rPr lang="en" sz="1400" b="0" i="0" u="none" strike="noStrike" cap="none" dirty="0">
                 <a:solidFill>
                   <a:schemeClr val="dk2"/>
                 </a:solidFill>
@@ -18088,9 +19019,33 @@
                 <a:cs typeface="Arial"/>
                 <a:sym typeface="Arial"/>
               </a:rPr>
-              <a:t>[Insert loss plot for SimpleNetFinal here]</a:t>
+              <a:t>[Insert loss plot for </a:t>
             </a:r>
-            <a:endParaRPr sz="1400" b="0" i="0" u="none" strike="noStrike" cap="none">
+            <a:r>
+              <a:rPr lang="en" sz="1400" b="0" i="0" u="none" strike="noStrike" cap="none" dirty="0" err="1">
+                <a:solidFill>
+                  <a:schemeClr val="dk2"/>
+                </a:solidFill>
+                <a:latin typeface="Arial"/>
+                <a:ea typeface="Arial"/>
+                <a:cs typeface="Arial"/>
+                <a:sym typeface="Arial"/>
+              </a:rPr>
+              <a:t>SimpleNetFinal</a:t>
+            </a:r>
+            <a:r>
+              <a:rPr lang="en" sz="1400" b="0" i="0" u="none" strike="noStrike" cap="none" dirty="0">
+                <a:solidFill>
+                  <a:schemeClr val="dk2"/>
+                </a:solidFill>
+                <a:latin typeface="Arial"/>
+                <a:ea typeface="Arial"/>
+                <a:cs typeface="Arial"/>
+                <a:sym typeface="Arial"/>
+              </a:rPr>
+              <a:t> here]</a:t>
+            </a:r>
+            <a:endParaRPr sz="1400" b="0" i="0" u="none" strike="noStrike" cap="none" dirty="0">
               <a:solidFill>
                 <a:srgbClr val="000000"/>
               </a:solidFill>
@@ -18118,7 +19073,7 @@
               <a:buFont typeface="Arial"/>
               <a:buNone/>
             </a:pPr>
-            <a:endParaRPr sz="1400" b="0" i="0" u="none" strike="noStrike" cap="none">
+            <a:endParaRPr sz="1400" b="0" i="0" u="none" strike="noStrike" cap="none" dirty="0">
               <a:solidFill>
                 <a:srgbClr val="000000"/>
               </a:solidFill>
@@ -18146,7 +19101,7 @@
               <a:buFont typeface="Arial"/>
               <a:buNone/>
             </a:pPr>
-            <a:endParaRPr sz="1400" b="0" i="0" u="none" strike="noStrike" cap="none">
+            <a:endParaRPr sz="1400" b="0" i="0" u="none" strike="noStrike" cap="none" dirty="0">
               <a:solidFill>
                 <a:srgbClr val="000000"/>
               </a:solidFill>
@@ -18174,7 +19129,7 @@
               <a:buFont typeface="Arial"/>
               <a:buNone/>
             </a:pPr>
-            <a:endParaRPr sz="1400" b="0" i="0" u="none" strike="noStrike" cap="none">
+            <a:endParaRPr sz="1400" b="0" i="0" u="none" strike="noStrike" cap="none" dirty="0">
               <a:solidFill>
                 <a:srgbClr val="000000"/>
               </a:solidFill>
@@ -18202,7 +19157,7 @@
               <a:buFont typeface="Arial"/>
               <a:buNone/>
             </a:pPr>
-            <a:endParaRPr sz="1400" b="0" i="0" u="none" strike="noStrike" cap="none">
+            <a:endParaRPr sz="1400" b="0" i="0" u="none" strike="noStrike" cap="none" dirty="0">
               <a:solidFill>
                 <a:srgbClr val="000000"/>
               </a:solidFill>
@@ -18230,7 +19185,7 @@
               <a:buFont typeface="Arial"/>
               <a:buNone/>
             </a:pPr>
-            <a:endParaRPr sz="1400" b="0" i="0" u="none" strike="noStrike" cap="none">
+            <a:endParaRPr sz="1400" b="0" i="0" u="none" strike="noStrike" cap="none" dirty="0">
               <a:solidFill>
                 <a:srgbClr val="000000"/>
               </a:solidFill>
@@ -18258,7 +19213,7 @@
               <a:buFont typeface="Arial"/>
               <a:buNone/>
             </a:pPr>
-            <a:endParaRPr sz="1400" b="0" i="0" u="none" strike="noStrike" cap="none">
+            <a:endParaRPr sz="1400" b="0" i="0" u="none" strike="noStrike" cap="none" dirty="0">
               <a:solidFill>
                 <a:srgbClr val="000000"/>
               </a:solidFill>
@@ -18286,7 +19241,7 @@
               <a:buFont typeface="Arial"/>
               <a:buNone/>
             </a:pPr>
-            <a:endParaRPr sz="1400" b="0" i="0" u="none" strike="noStrike" cap="none">
+            <a:endParaRPr sz="1400" b="0" i="0" u="none" strike="noStrike" cap="none" dirty="0">
               <a:solidFill>
                 <a:srgbClr val="000000"/>
               </a:solidFill>
@@ -18314,7 +19269,7 @@
               <a:buFont typeface="Arial"/>
               <a:buNone/>
             </a:pPr>
-            <a:endParaRPr sz="1400" b="0" i="0" u="none" strike="noStrike" cap="none">
+            <a:endParaRPr sz="1400" b="0" i="0" u="none" strike="noStrike" cap="none" dirty="0">
               <a:solidFill>
                 <a:srgbClr val="000000"/>
               </a:solidFill>
@@ -18342,7 +19297,7 @@
               <a:buFont typeface="Arial"/>
               <a:buNone/>
             </a:pPr>
-            <a:endParaRPr sz="1400" b="0" i="0" u="none" strike="noStrike" cap="none">
+            <a:endParaRPr sz="1400" b="0" i="0" u="none" strike="noStrike" cap="none" dirty="0">
               <a:solidFill>
                 <a:srgbClr val="000000"/>
               </a:solidFill>
@@ -18370,8 +19325,36 @@
               <a:buFont typeface="Arial"/>
               <a:buNone/>
             </a:pPr>
+            <a:endParaRPr lang="en" sz="1400" b="0" i="0" u="none" strike="noStrike" cap="none" dirty="0">
+              <a:solidFill>
+                <a:schemeClr val="dk2"/>
+              </a:solidFill>
+              <a:latin typeface="Arial"/>
+              <a:ea typeface="Arial"/>
+              <a:cs typeface="Arial"/>
+              <a:sym typeface="Arial"/>
+            </a:endParaRPr>
+          </a:p>
+          <a:p>
+            <a:pPr marL="0" marR="0" lvl="0" indent="0" algn="l" rtl="0">
+              <a:lnSpc>
+                <a:spcPct val="115000"/>
+              </a:lnSpc>
+              <a:spcBef>
+                <a:spcPts val="0"/>
+              </a:spcBef>
+              <a:spcAft>
+                <a:spcPts val="0"/>
+              </a:spcAft>
+              <a:buClr>
+                <a:schemeClr val="dk2"/>
+              </a:buClr>
+              <a:buSzPts val="1400"/>
+              <a:buFont typeface="Arial"/>
+              <a:buNone/>
+            </a:pPr>
             <a:r>
-              <a:rPr lang="en" sz="1400" b="0" i="0" u="none" strike="noStrike" cap="none">
+              <a:rPr lang="en" sz="1400" b="0" i="0" u="none" strike="noStrike" cap="none" dirty="0">
                 <a:solidFill>
                   <a:schemeClr val="dk2"/>
                 </a:solidFill>
@@ -18380,9 +19363,9 @@
                 <a:cs typeface="Arial"/>
                 <a:sym typeface="Arial"/>
               </a:rPr>
-              <a:t>Final training accuracy:</a:t>
+              <a:t>Final training accuracy: 60.335%</a:t>
             </a:r>
-            <a:endParaRPr sz="1400" b="0" i="0" u="none" strike="noStrike" cap="none">
+            <a:endParaRPr sz="1400" b="0" i="0" u="none" strike="noStrike" cap="none" dirty="0">
               <a:solidFill>
                 <a:srgbClr val="000000"/>
               </a:solidFill>
@@ -18410,7 +19393,7 @@
               <a:buFont typeface="Arial"/>
               <a:buNone/>
             </a:pPr>
-            <a:endParaRPr sz="1400" b="0" i="0" u="none" strike="noStrike" cap="none">
+            <a:endParaRPr sz="1400" b="0" i="0" u="none" strike="noStrike" cap="none" dirty="0">
               <a:solidFill>
                 <a:srgbClr val="000000"/>
               </a:solidFill>
@@ -18439,7 +19422,7 @@
               <a:buNone/>
             </a:pPr>
             <a:r>
-              <a:rPr lang="en" sz="1400" b="0" i="0" u="none" strike="noStrike" cap="none">
+              <a:rPr lang="en" sz="1400" b="0" i="0" u="none" strike="noStrike" cap="none" dirty="0">
                 <a:solidFill>
                   <a:schemeClr val="dk2"/>
                 </a:solidFill>
@@ -18448,9 +19431,9 @@
                 <a:cs typeface="Arial"/>
                 <a:sym typeface="Arial"/>
               </a:rPr>
-              <a:t>Final validation accuracy:</a:t>
+              <a:t>Final validation accuracy: 61.2%</a:t>
             </a:r>
-            <a:endParaRPr sz="1400" b="0" i="0" u="none" strike="noStrike" cap="none">
+            <a:endParaRPr sz="1400" b="0" i="0" u="none" strike="noStrike" cap="none" dirty="0">
               <a:solidFill>
                 <a:srgbClr val="000000"/>
               </a:solidFill>
@@ -18509,7 +19492,7 @@
               <a:buNone/>
             </a:pPr>
             <a:r>
-              <a:rPr lang="en" sz="1400" b="0" i="0" u="none" strike="noStrike" cap="none">
+              <a:rPr lang="en" sz="1400" b="0" i="0" u="none" strike="noStrike" cap="none" dirty="0">
                 <a:solidFill>
                   <a:schemeClr val="dk2"/>
                 </a:solidFill>
@@ -18518,9 +19501,33 @@
                 <a:cs typeface="Arial"/>
                 <a:sym typeface="Arial"/>
               </a:rPr>
-              <a:t>[Insert accuracy plot for SimpleNetFinal here]</a:t>
+              <a:t>[Insert accuracy plot for </a:t>
             </a:r>
-            <a:endParaRPr sz="1400" b="0" i="0" u="none" strike="noStrike" cap="none">
+            <a:r>
+              <a:rPr lang="en" sz="1400" b="0" i="0" u="none" strike="noStrike" cap="none" dirty="0" err="1">
+                <a:solidFill>
+                  <a:schemeClr val="dk2"/>
+                </a:solidFill>
+                <a:latin typeface="Arial"/>
+                <a:ea typeface="Arial"/>
+                <a:cs typeface="Arial"/>
+                <a:sym typeface="Arial"/>
+              </a:rPr>
+              <a:t>SimpleNetFinal</a:t>
+            </a:r>
+            <a:r>
+              <a:rPr lang="en" sz="1400" b="0" i="0" u="none" strike="noStrike" cap="none" dirty="0">
+                <a:solidFill>
+                  <a:schemeClr val="dk2"/>
+                </a:solidFill>
+                <a:latin typeface="Arial"/>
+                <a:ea typeface="Arial"/>
+                <a:cs typeface="Arial"/>
+                <a:sym typeface="Arial"/>
+              </a:rPr>
+              <a:t> here]</a:t>
+            </a:r>
+            <a:endParaRPr sz="1400" b="0" i="0" u="none" strike="noStrike" cap="none" dirty="0">
               <a:solidFill>
                 <a:srgbClr val="000000"/>
               </a:solidFill>
@@ -18532,6 +19539,66 @@
           </a:p>
         </p:txBody>
       </p:sp>
+      <p:pic>
+        <p:nvPicPr>
+          <p:cNvPr id="2" name="Picture 1">
+            <a:extLst>
+              <a:ext uri="{FF2B5EF4-FFF2-40B4-BE49-F238E27FC236}">
+                <a16:creationId xmlns:a16="http://schemas.microsoft.com/office/drawing/2014/main" id="{92A38432-943A-254A-82E3-6E70418190DA}"/>
+              </a:ext>
+            </a:extLst>
+          </p:cNvPr>
+          <p:cNvPicPr>
+            <a:picLocks noChangeAspect="1"/>
+          </p:cNvPicPr>
+          <p:nvPr/>
+        </p:nvPicPr>
+        <p:blipFill>
+          <a:blip r:embed="rId3"/>
+          <a:stretch>
+            <a:fillRect/>
+          </a:stretch>
+        </p:blipFill>
+        <p:spPr>
+          <a:xfrm>
+            <a:off x="399992" y="1425280"/>
+            <a:ext cx="2896661" cy="2305089"/>
+          </a:xfrm>
+          <a:prstGeom prst="rect">
+            <a:avLst/>
+          </a:prstGeom>
+        </p:spPr>
+      </p:pic>
+      <p:pic>
+        <p:nvPicPr>
+          <p:cNvPr id="3" name="Picture 2">
+            <a:extLst>
+              <a:ext uri="{FF2B5EF4-FFF2-40B4-BE49-F238E27FC236}">
+                <a16:creationId xmlns:a16="http://schemas.microsoft.com/office/drawing/2014/main" id="{621C02E0-9BF9-8244-BB07-90564F4A544B}"/>
+              </a:ext>
+            </a:extLst>
+          </p:cNvPr>
+          <p:cNvPicPr>
+            <a:picLocks noChangeAspect="1"/>
+          </p:cNvPicPr>
+          <p:nvPr/>
+        </p:nvPicPr>
+        <p:blipFill>
+          <a:blip r:embed="rId4"/>
+          <a:stretch>
+            <a:fillRect/>
+          </a:stretch>
+        </p:blipFill>
+        <p:spPr>
+          <a:xfrm>
+            <a:off x="4832280" y="1625935"/>
+            <a:ext cx="3606800" cy="2870200"/>
+          </a:xfrm>
+          <a:prstGeom prst="rect">
+            <a:avLst/>
+          </a:prstGeom>
+        </p:spPr>
+      </p:pic>
     </p:spTree>
   </p:cSld>
   <p:clrMapOvr>
@@ -18604,7 +19671,7 @@
               <a:buNone/>
             </a:pPr>
             <a:r>
-              <a:rPr lang="en" sz="2800" b="0" strike="noStrike">
+              <a:rPr lang="en" sz="2800" b="0" strike="noStrike" dirty="0">
                 <a:solidFill>
                   <a:schemeClr val="dk1"/>
                 </a:solidFill>
@@ -18613,9 +19680,21 @@
                 <a:cs typeface="Arial"/>
                 <a:sym typeface="Arial"/>
               </a:rPr>
-              <a:t>Part 2: SimpleNetFinal</a:t>
+              <a:t>Part 2: </a:t>
             </a:r>
-            <a:endParaRPr sz="2800" b="0" strike="noStrike">
+            <a:r>
+              <a:rPr lang="en" sz="2800" b="0" strike="noStrike" dirty="0" err="1">
+                <a:solidFill>
+                  <a:schemeClr val="dk1"/>
+                </a:solidFill>
+                <a:latin typeface="Arial"/>
+                <a:ea typeface="Arial"/>
+                <a:cs typeface="Arial"/>
+                <a:sym typeface="Arial"/>
+              </a:rPr>
+              <a:t>SimpleNetFinal</a:t>
+            </a:r>
+            <a:endParaRPr sz="2800" b="0" strike="noStrike" dirty="0">
               <a:solidFill>
                 <a:srgbClr val="000000"/>
               </a:solidFill>
@@ -18674,7 +19753,7 @@
               <a:buNone/>
             </a:pPr>
             <a:r>
-              <a:rPr lang="en" sz="1400" b="0" i="0" u="none" strike="noStrike" cap="none">
+              <a:rPr lang="en" sz="1400" b="0" i="0" u="none" strike="noStrike" cap="none" dirty="0">
                 <a:solidFill>
                   <a:schemeClr val="dk2"/>
                 </a:solidFill>
@@ -18685,14 +19764,311 @@
               </a:rPr>
               <a:t>[Name 10 different possible transformations for data augmentation.]</a:t>
             </a:r>
-            <a:endParaRPr sz="1400" b="0" i="0" u="none" strike="noStrike" cap="none">
+          </a:p>
+          <a:p>
+            <a:pPr marL="342900" marR="0" lvl="0" algn="l" rtl="0">
+              <a:lnSpc>
+                <a:spcPct val="115000"/>
+              </a:lnSpc>
+              <a:spcBef>
+                <a:spcPts val="0"/>
+              </a:spcBef>
+              <a:spcAft>
+                <a:spcPts val="0"/>
+              </a:spcAft>
+              <a:buClr>
+                <a:schemeClr val="dk2"/>
+              </a:buClr>
+              <a:buSzPts val="1400"/>
+              <a:buFont typeface="Arial"/>
+              <a:buAutoNum type="arabicPeriod"/>
+            </a:pPr>
+            <a:r>
+              <a:rPr lang="en" sz="1400" dirty="0">
+                <a:solidFill>
+                  <a:schemeClr val="tx1"/>
+                </a:solidFill>
+              </a:rPr>
+              <a:t>Random Horizontal Flip</a:t>
+            </a:r>
+          </a:p>
+          <a:p>
+            <a:pPr marL="342900" marR="0" lvl="0" algn="l" rtl="0">
+              <a:lnSpc>
+                <a:spcPct val="115000"/>
+              </a:lnSpc>
+              <a:spcBef>
+                <a:spcPts val="0"/>
+              </a:spcBef>
+              <a:spcAft>
+                <a:spcPts val="0"/>
+              </a:spcAft>
+              <a:buClr>
+                <a:schemeClr val="dk2"/>
+              </a:buClr>
+              <a:buSzPts val="1400"/>
+              <a:buFont typeface="Arial"/>
+              <a:buAutoNum type="arabicPeriod"/>
+            </a:pPr>
+            <a:r>
+              <a:rPr lang="en" sz="1400" b="0" i="0" u="none" strike="noStrike" cap="none" dirty="0">
+                <a:solidFill>
+                  <a:schemeClr val="tx1"/>
+                </a:solidFill>
+                <a:latin typeface="Arial"/>
+                <a:ea typeface="Arial"/>
+                <a:cs typeface="Arial"/>
+                <a:sym typeface="Arial"/>
+              </a:rPr>
+              <a:t>Random Vertical Flip</a:t>
+            </a:r>
+          </a:p>
+          <a:p>
+            <a:pPr marL="342900" marR="0" lvl="0" algn="l" rtl="0">
+              <a:lnSpc>
+                <a:spcPct val="115000"/>
+              </a:lnSpc>
+              <a:spcBef>
+                <a:spcPts val="0"/>
+              </a:spcBef>
+              <a:spcAft>
+                <a:spcPts val="0"/>
+              </a:spcAft>
+              <a:buClr>
+                <a:schemeClr val="dk2"/>
+              </a:buClr>
+              <a:buSzPts val="1400"/>
+              <a:buFont typeface="Arial"/>
+              <a:buAutoNum type="arabicPeriod"/>
+            </a:pPr>
+            <a:r>
+              <a:rPr lang="en" sz="1400" dirty="0">
+                <a:solidFill>
+                  <a:schemeClr val="tx1"/>
+                </a:solidFill>
+              </a:rPr>
+              <a:t>Random rotation</a:t>
+            </a:r>
+          </a:p>
+          <a:p>
+            <a:pPr marL="342900" marR="0" lvl="0" algn="l" rtl="0">
+              <a:lnSpc>
+                <a:spcPct val="115000"/>
+              </a:lnSpc>
+              <a:spcBef>
+                <a:spcPts val="0"/>
+              </a:spcBef>
+              <a:spcAft>
+                <a:spcPts val="0"/>
+              </a:spcAft>
+              <a:buClr>
+                <a:schemeClr val="dk2"/>
+              </a:buClr>
+              <a:buSzPts val="1400"/>
+              <a:buFont typeface="Arial"/>
+              <a:buAutoNum type="arabicPeriod"/>
+            </a:pPr>
+            <a:r>
+              <a:rPr lang="en" sz="1400" b="0" i="0" u="none" strike="noStrike" cap="none" dirty="0">
+                <a:solidFill>
+                  <a:schemeClr val="tx1"/>
+                </a:solidFill>
+                <a:latin typeface="Arial"/>
+                <a:ea typeface="Arial"/>
+                <a:cs typeface="Arial"/>
+                <a:sym typeface="Arial"/>
+              </a:rPr>
+              <a:t>Random Resizing crop</a:t>
+            </a:r>
+          </a:p>
+          <a:p>
+            <a:pPr marL="342900" marR="0" lvl="0" algn="l" rtl="0">
+              <a:lnSpc>
+                <a:spcPct val="115000"/>
+              </a:lnSpc>
+              <a:spcBef>
+                <a:spcPts val="0"/>
+              </a:spcBef>
+              <a:spcAft>
+                <a:spcPts val="0"/>
+              </a:spcAft>
+              <a:buClr>
+                <a:schemeClr val="dk2"/>
+              </a:buClr>
+              <a:buSzPts val="1400"/>
+              <a:buFont typeface="Arial"/>
+              <a:buAutoNum type="arabicPeriod"/>
+            </a:pPr>
+            <a:r>
+              <a:rPr lang="en" sz="1400" dirty="0">
+                <a:solidFill>
+                  <a:schemeClr val="tx1"/>
+                </a:solidFill>
+              </a:rPr>
+              <a:t>Color jitter</a:t>
+            </a:r>
+            <a:endParaRPr lang="en-US" sz="1400" dirty="0">
               <a:solidFill>
-                <a:srgbClr val="000000"/>
+                <a:schemeClr val="tx1"/>
               </a:solidFill>
-              <a:latin typeface="Arial"/>
-              <a:ea typeface="Arial"/>
-              <a:cs typeface="Arial"/>
-              <a:sym typeface="Arial"/>
+            </a:endParaRPr>
+          </a:p>
+          <a:p>
+            <a:pPr marL="342900" marR="0" lvl="0" algn="l" rtl="0">
+              <a:lnSpc>
+                <a:spcPct val="115000"/>
+              </a:lnSpc>
+              <a:spcBef>
+                <a:spcPts val="0"/>
+              </a:spcBef>
+              <a:spcAft>
+                <a:spcPts val="0"/>
+              </a:spcAft>
+              <a:buClr>
+                <a:schemeClr val="dk2"/>
+              </a:buClr>
+              <a:buSzPts val="1400"/>
+              <a:buFont typeface="Arial"/>
+              <a:buAutoNum type="arabicPeriod"/>
+            </a:pPr>
+            <a:r>
+              <a:rPr lang="en-US" sz="1400" dirty="0">
+                <a:solidFill>
+                  <a:srgbClr val="000000"/>
+                </a:solidFill>
+              </a:rPr>
+              <a:t>Random Affine Transform</a:t>
+            </a:r>
+          </a:p>
+          <a:p>
+            <a:pPr marL="342900" marR="0" lvl="0" algn="l" rtl="0">
+              <a:lnSpc>
+                <a:spcPct val="115000"/>
+              </a:lnSpc>
+              <a:spcBef>
+                <a:spcPts val="0"/>
+              </a:spcBef>
+              <a:spcAft>
+                <a:spcPts val="0"/>
+              </a:spcAft>
+              <a:buClr>
+                <a:schemeClr val="dk2"/>
+              </a:buClr>
+              <a:buSzPts val="1400"/>
+              <a:buFont typeface="Arial"/>
+              <a:buAutoNum type="arabicPeriod"/>
+            </a:pPr>
+            <a:r>
+              <a:rPr lang="en-US" sz="1400" dirty="0">
+                <a:solidFill>
+                  <a:srgbClr val="000000"/>
+                </a:solidFill>
+              </a:rPr>
+              <a:t>Gaussian Blur</a:t>
+            </a:r>
+          </a:p>
+          <a:p>
+            <a:pPr marL="342900" marR="0" lvl="0" algn="l" rtl="0">
+              <a:lnSpc>
+                <a:spcPct val="115000"/>
+              </a:lnSpc>
+              <a:spcBef>
+                <a:spcPts val="0"/>
+              </a:spcBef>
+              <a:spcAft>
+                <a:spcPts val="0"/>
+              </a:spcAft>
+              <a:buClr>
+                <a:schemeClr val="dk2"/>
+              </a:buClr>
+              <a:buSzPts val="1400"/>
+              <a:buFont typeface="Arial"/>
+              <a:buAutoNum type="arabicPeriod"/>
+            </a:pPr>
+            <a:r>
+              <a:rPr lang="en-US" sz="1400" dirty="0">
+                <a:solidFill>
+                  <a:srgbClr val="000000"/>
+                </a:solidFill>
+              </a:rPr>
+              <a:t>Random patch erasing</a:t>
+            </a:r>
+          </a:p>
+          <a:p>
+            <a:pPr marL="342900" marR="0" lvl="0" algn="l" rtl="0">
+              <a:lnSpc>
+                <a:spcPct val="115000"/>
+              </a:lnSpc>
+              <a:spcBef>
+                <a:spcPts val="0"/>
+              </a:spcBef>
+              <a:spcAft>
+                <a:spcPts val="0"/>
+              </a:spcAft>
+              <a:buClr>
+                <a:schemeClr val="dk2"/>
+              </a:buClr>
+              <a:buSzPts val="1400"/>
+              <a:buFont typeface="Arial"/>
+              <a:buAutoNum type="arabicPeriod"/>
+            </a:pPr>
+            <a:r>
+              <a:rPr lang="en-US" sz="1400" dirty="0">
+                <a:solidFill>
+                  <a:srgbClr val="000000"/>
+                </a:solidFill>
+              </a:rPr>
+              <a:t>Random perspective warp</a:t>
+            </a:r>
+          </a:p>
+          <a:p>
+            <a:pPr marL="342900" marR="0" lvl="0" algn="l" rtl="0">
+              <a:lnSpc>
+                <a:spcPct val="115000"/>
+              </a:lnSpc>
+              <a:spcBef>
+                <a:spcPts val="0"/>
+              </a:spcBef>
+              <a:spcAft>
+                <a:spcPts val="0"/>
+              </a:spcAft>
+              <a:buClr>
+                <a:schemeClr val="dk2"/>
+              </a:buClr>
+              <a:buSzPts val="1400"/>
+              <a:buFont typeface="Arial"/>
+              <a:buAutoNum type="arabicPeriod"/>
+            </a:pPr>
+            <a:r>
+              <a:rPr lang="en-US" sz="1400" dirty="0">
+                <a:solidFill>
+                  <a:srgbClr val="000000"/>
+                </a:solidFill>
+              </a:rPr>
+              <a:t>Gaussian Noise</a:t>
+            </a:r>
+          </a:p>
+          <a:p>
+            <a:pPr marL="0" marR="0" lvl="0" indent="0" algn="l" rtl="0">
+              <a:lnSpc>
+                <a:spcPct val="115000"/>
+              </a:lnSpc>
+              <a:spcBef>
+                <a:spcPts val="0"/>
+              </a:spcBef>
+              <a:spcAft>
+                <a:spcPts val="0"/>
+              </a:spcAft>
+              <a:buClr>
+                <a:schemeClr val="dk2"/>
+              </a:buClr>
+              <a:buSzPts val="1400"/>
+              <a:buNone/>
+            </a:pPr>
+            <a:endParaRPr lang="en" sz="1400" dirty="0">
+              <a:solidFill>
+                <a:schemeClr val="dk2"/>
+              </a:solidFill>
             </a:endParaRPr>
           </a:p>
         </p:txBody>
@@ -18744,7 +20120,7 @@
               <a:buNone/>
             </a:pPr>
             <a:r>
-              <a:rPr lang="en" sz="1400" b="0" i="0" u="none" strike="noStrike" cap="none">
+              <a:rPr lang="en" sz="1400" b="0" i="0" u="none" strike="noStrike" cap="none" dirty="0">
                 <a:solidFill>
                   <a:schemeClr val="dk2"/>
                 </a:solidFill>
@@ -18755,9 +20131,76 @@
               </a:rPr>
               <a:t>[What is the desired variance after each layer? Why would that be helpful?]</a:t>
             </a:r>
-            <a:endParaRPr sz="1400" b="0" i="0" u="none" strike="noStrike" cap="none">
+          </a:p>
+          <a:p>
+            <a:pPr marL="0" marR="0" lvl="0" indent="0" algn="l" rtl="0">
+              <a:lnSpc>
+                <a:spcPct val="115000"/>
+              </a:lnSpc>
+              <a:spcBef>
+                <a:spcPts val="0"/>
+              </a:spcBef>
+              <a:spcAft>
+                <a:spcPts val="0"/>
+              </a:spcAft>
+              <a:buClr>
+                <a:schemeClr val="dk2"/>
+              </a:buClr>
+              <a:buSzPts val="1400"/>
+              <a:buFont typeface="Arial"/>
+              <a:buNone/>
+            </a:pPr>
+            <a:r>
+              <a:rPr lang="en" sz="1400" dirty="0">
+                <a:solidFill>
+                  <a:schemeClr val="tx1"/>
+                </a:solidFill>
+              </a:rPr>
+              <a:t>The desired variance of </a:t>
+            </a:r>
+            <a:r>
+              <a:rPr lang="en-IN" sz="1400" dirty="0">
+                <a:solidFill>
+                  <a:schemeClr val="tx1"/>
+                </a:solidFill>
+              </a:rPr>
+              <a:t>the activations(outputs) is 1, along with a desired mean of 0. We implement this using </a:t>
+            </a:r>
+            <a:r>
+              <a:rPr lang="en-IN" sz="1400" dirty="0" err="1">
+                <a:solidFill>
+                  <a:schemeClr val="tx1"/>
+                </a:solidFill>
+              </a:rPr>
+              <a:t>BatchNorm</a:t>
+            </a:r>
+            <a:r>
+              <a:rPr lang="en-IN" sz="1400" dirty="0">
+                <a:solidFill>
+                  <a:schemeClr val="tx1"/>
+                </a:solidFill>
+              </a:rPr>
+              <a:t>. The </a:t>
+            </a:r>
+            <a:r>
+              <a:rPr lang="en-IN" sz="1400" dirty="0" err="1">
+                <a:solidFill>
+                  <a:schemeClr val="tx1"/>
+                </a:solidFill>
+              </a:rPr>
+              <a:t>batchnorm</a:t>
+            </a:r>
+            <a:r>
+              <a:rPr lang="en-IN" sz="1400" dirty="0">
+                <a:solidFill>
+                  <a:schemeClr val="tx1"/>
+                </a:solidFill>
+              </a:rPr>
+              <a:t> is crucial for mitigating risk of Internal Covariance Shift, which is the unstable change in layer distributions during training. This norm prevents that problem, allowing us to use faster learning rates, while avoiding the training process divergence. This allows for convergence to optimality quicker. </a:t>
+            </a:r>
+            <a:endParaRPr sz="1400" b="0" i="0" u="none" strike="noStrike" cap="none" dirty="0">
               <a:solidFill>
-                <a:srgbClr val="000000"/>
+                <a:schemeClr val="tx1"/>
               </a:solidFill>
               <a:latin typeface="Arial"/>
               <a:ea typeface="Arial"/>
@@ -18839,7 +20282,7 @@
               <a:buNone/>
             </a:pPr>
             <a:r>
-              <a:rPr lang="en" sz="2800" b="0" strike="noStrike">
+              <a:rPr lang="en" sz="2800" b="0" strike="noStrike" dirty="0">
                 <a:solidFill>
                   <a:schemeClr val="dk1"/>
                 </a:solidFill>
@@ -18848,9 +20291,21 @@
                 <a:cs typeface="Arial"/>
                 <a:sym typeface="Arial"/>
               </a:rPr>
-              <a:t>Part 2: SimpleNetFinal</a:t>
+              <a:t>Part 2: </a:t>
             </a:r>
-            <a:endParaRPr sz="2800" b="0" strike="noStrike">
+            <a:r>
+              <a:rPr lang="en" sz="2800" b="0" strike="noStrike" dirty="0" err="1">
+                <a:solidFill>
+                  <a:schemeClr val="dk1"/>
+                </a:solidFill>
+                <a:latin typeface="Arial"/>
+                <a:ea typeface="Arial"/>
+                <a:cs typeface="Arial"/>
+                <a:sym typeface="Arial"/>
+              </a:rPr>
+              <a:t>SimpleNetFinal</a:t>
+            </a:r>
+            <a:endParaRPr sz="2800" b="0" strike="noStrike" dirty="0">
               <a:solidFill>
                 <a:srgbClr val="000000"/>
               </a:solidFill>
@@ -18909,7 +20364,7 @@
               <a:buNone/>
             </a:pPr>
             <a:r>
-              <a:rPr lang="en" sz="1400" b="0" i="0" u="none" strike="noStrike" cap="none">
+              <a:rPr lang="en" sz="1400" b="0" i="0" u="none" strike="noStrike" cap="none" dirty="0">
                 <a:solidFill>
                   <a:schemeClr val="dk2"/>
                 </a:solidFill>
@@ -18920,7 +20375,62 @@
               </a:rPr>
               <a:t>[What distribution is dropout usually sampled from?]</a:t>
             </a:r>
-            <a:endParaRPr sz="1400" b="0" i="0" u="none" strike="noStrike" cap="none">
+          </a:p>
+          <a:p>
+            <a:pPr marL="0" marR="0" lvl="0" indent="0" algn="l" rtl="0">
+              <a:lnSpc>
+                <a:spcPct val="115000"/>
+              </a:lnSpc>
+              <a:spcBef>
+                <a:spcPts val="0"/>
+              </a:spcBef>
+              <a:spcAft>
+                <a:spcPts val="0"/>
+              </a:spcAft>
+              <a:buClr>
+                <a:schemeClr val="dk1"/>
+              </a:buClr>
+              <a:buSzPts val="1400"/>
+              <a:buFont typeface="Arial"/>
+              <a:buNone/>
+            </a:pPr>
+            <a:r>
+              <a:rPr lang="en-US" sz="1400" b="0" i="0" u="none" strike="noStrike" cap="none" dirty="0">
+                <a:solidFill>
+                  <a:srgbClr val="000000"/>
+                </a:solidFill>
+                <a:latin typeface="Arial"/>
+                <a:ea typeface="Arial"/>
+                <a:cs typeface="Arial"/>
+                <a:sym typeface="Arial"/>
+              </a:rPr>
+              <a:t>Dropout is usually sampled from the Bernoulli distribution, as dropout can be compared to a Bernoulli trial, with a probability ’1-p’ of choice of dropping a neuron. The value “p” in </a:t>
+            </a:r>
+            <a:r>
+              <a:rPr lang="en-US" sz="1400" b="0" i="0" u="none" strike="noStrike" cap="none" dirty="0" err="1">
+                <a:solidFill>
+                  <a:srgbClr val="000000"/>
+                </a:solidFill>
+                <a:latin typeface="Arial"/>
+                <a:ea typeface="Arial"/>
+                <a:cs typeface="Arial"/>
+                <a:sym typeface="Arial"/>
+              </a:rPr>
+              <a:t>nn.Dropout</a:t>
+            </a:r>
+            <a:r>
+              <a:rPr lang="en-US" sz="1400" b="0" i="0" u="none" strike="noStrike" cap="none" dirty="0">
+                <a:solidFill>
+                  <a:srgbClr val="000000"/>
+                </a:solidFill>
+                <a:latin typeface="Arial"/>
+                <a:ea typeface="Arial"/>
+                <a:cs typeface="Arial"/>
+                <a:sym typeface="Arial"/>
+              </a:rPr>
+              <a:t>(p) refers to the probability of an element being dropped.</a:t>
+            </a:r>
+            <a:endParaRPr sz="1400" b="0" i="0" u="none" strike="noStrike" cap="none" dirty="0">
               <a:solidFill>
                 <a:srgbClr val="000000"/>
               </a:solidFill>
@@ -18942,15 +20452,15 @@
                 <a:spcPts val="0"/>
               </a:spcAft>
               <a:buClr>
-                <a:schemeClr val="dk1"/>
+                <a:schemeClr val="dk2"/>
               </a:buClr>
               <a:buSzPts val="1400"/>
               <a:buFont typeface="Arial"/>
               <a:buNone/>
             </a:pPr>
-            <a:endParaRPr sz="1400" b="0" i="0" u="none" strike="noStrike" cap="none">
+            <a:endParaRPr lang="en" sz="1400" b="0" i="0" u="none" strike="noStrike" cap="none" dirty="0">
               <a:solidFill>
-                <a:srgbClr val="000000"/>
+                <a:schemeClr val="dk2"/>
               </a:solidFill>
               <a:latin typeface="Arial"/>
               <a:ea typeface="Arial"/>
@@ -18970,98 +20480,14 @@
                 <a:spcPts val="0"/>
               </a:spcAft>
               <a:buClr>
-                <a:schemeClr val="dk1"/>
+                <a:schemeClr val="dk2"/>
               </a:buClr>
               <a:buSzPts val="1400"/>
               <a:buFont typeface="Arial"/>
               <a:buNone/>
             </a:pPr>
-            <a:endParaRPr sz="1400" b="0" i="0" u="none" strike="noStrike" cap="none">
-              <a:solidFill>
-                <a:srgbClr val="000000"/>
-              </a:solidFill>
-              <a:latin typeface="Arial"/>
-              <a:ea typeface="Arial"/>
-              <a:cs typeface="Arial"/>
-              <a:sym typeface="Arial"/>
-            </a:endParaRPr>
-          </a:p>
-          <a:p>
-            <a:pPr marL="0" marR="0" lvl="0" indent="0" algn="l" rtl="0">
-              <a:lnSpc>
-                <a:spcPct val="115000"/>
-              </a:lnSpc>
-              <a:spcBef>
-                <a:spcPts val="0"/>
-              </a:spcBef>
-              <a:spcAft>
-                <a:spcPts val="0"/>
-              </a:spcAft>
-              <a:buClr>
-                <a:schemeClr val="dk1"/>
-              </a:buClr>
-              <a:buSzPts val="1400"/>
-              <a:buFont typeface="Arial"/>
-              <a:buNone/>
-            </a:pPr>
-            <a:endParaRPr sz="1400" b="0" i="0" u="none" strike="noStrike" cap="none">
-              <a:solidFill>
-                <a:srgbClr val="000000"/>
-              </a:solidFill>
-              <a:latin typeface="Arial"/>
-              <a:ea typeface="Arial"/>
-              <a:cs typeface="Arial"/>
-              <a:sym typeface="Arial"/>
-            </a:endParaRPr>
-          </a:p>
-          <a:p>
-            <a:pPr marL="0" marR="0" lvl="0" indent="0" algn="l" rtl="0">
-              <a:lnSpc>
-                <a:spcPct val="115000"/>
-              </a:lnSpc>
-              <a:spcBef>
-                <a:spcPts val="0"/>
-              </a:spcBef>
-              <a:spcAft>
-                <a:spcPts val="0"/>
-              </a:spcAft>
-              <a:buClr>
-                <a:schemeClr val="dk1"/>
-              </a:buClr>
-              <a:buSzPts val="1400"/>
-              <a:buFont typeface="Arial"/>
-              <a:buNone/>
-            </a:pPr>
-            <a:endParaRPr sz="1400" b="0" i="0" u="none" strike="noStrike" cap="none">
-              <a:solidFill>
-                <a:srgbClr val="000000"/>
-              </a:solidFill>
-              <a:latin typeface="Arial"/>
-              <a:ea typeface="Arial"/>
-              <a:cs typeface="Arial"/>
-              <a:sym typeface="Arial"/>
-            </a:endParaRPr>
-          </a:p>
-          <a:p>
-            <a:pPr marL="0" marR="0" lvl="0" indent="0" algn="l" rtl="0">
-              <a:lnSpc>
-                <a:spcPct val="115000"/>
-              </a:lnSpc>
-              <a:spcBef>
-                <a:spcPts val="0"/>
-              </a:spcBef>
-              <a:spcAft>
-                <a:spcPts val="0"/>
-              </a:spcAft>
-              <a:buClr>
-                <a:schemeClr val="dk2"/>
-              </a:buClr>
-              <a:buSzPts val="1400"/>
-              <a:buFont typeface="Arial"/>
-              <a:buNone/>
-            </a:pPr>
             <a:r>
-              <a:rPr lang="en" sz="1400" b="0" i="0" u="none" strike="noStrike" cap="none">
+              <a:rPr lang="en" sz="1400" b="0" i="0" u="none" strike="noStrike" cap="none" dirty="0">
                 <a:solidFill>
                   <a:schemeClr val="dk2"/>
                 </a:solidFill>
@@ -19070,9 +20496,135 @@
                 <a:cs typeface="Arial"/>
                 <a:sym typeface="Arial"/>
               </a:rPr>
-              <a:t>[How many parameters does your base SimpleNet model have? How many parameters does your SimpleNetFinal model have?]</a:t>
+              <a:t>[How many parameters does your base </a:t>
             </a:r>
-            <a:endParaRPr sz="1400" b="0" i="0" u="none" strike="noStrike" cap="none">
+            <a:r>
+              <a:rPr lang="en" sz="1400" b="0" i="0" u="none" strike="noStrike" cap="none" dirty="0" err="1">
+                <a:solidFill>
+                  <a:schemeClr val="dk2"/>
+                </a:solidFill>
+                <a:latin typeface="Arial"/>
+                <a:ea typeface="Arial"/>
+                <a:cs typeface="Arial"/>
+                <a:sym typeface="Arial"/>
+              </a:rPr>
+              <a:t>SimpleNet</a:t>
+            </a:r>
+            <a:r>
+              <a:rPr lang="en" sz="1400" b="0" i="0" u="none" strike="noStrike" cap="none" dirty="0">
+                <a:solidFill>
+                  <a:schemeClr val="dk2"/>
+                </a:solidFill>
+                <a:latin typeface="Arial"/>
+                <a:ea typeface="Arial"/>
+                <a:cs typeface="Arial"/>
+                <a:sym typeface="Arial"/>
+              </a:rPr>
+              <a:t> model have? How many parameters does your </a:t>
+            </a:r>
+            <a:r>
+              <a:rPr lang="en" sz="1400" b="0" i="0" u="none" strike="noStrike" cap="none" dirty="0" err="1">
+                <a:solidFill>
+                  <a:schemeClr val="dk2"/>
+                </a:solidFill>
+                <a:latin typeface="Arial"/>
+                <a:ea typeface="Arial"/>
+                <a:cs typeface="Arial"/>
+                <a:sym typeface="Arial"/>
+              </a:rPr>
+              <a:t>SimpleNetFinal</a:t>
+            </a:r>
+            <a:r>
+              <a:rPr lang="en" sz="1400" b="0" i="0" u="none" strike="noStrike" cap="none" dirty="0">
+                <a:solidFill>
+                  <a:schemeClr val="dk2"/>
+                </a:solidFill>
+                <a:latin typeface="Arial"/>
+                <a:ea typeface="Arial"/>
+                <a:cs typeface="Arial"/>
+                <a:sym typeface="Arial"/>
+              </a:rPr>
+              <a:t> model have?]</a:t>
+            </a:r>
+          </a:p>
+          <a:p>
+            <a:pPr marL="0" lvl="0" indent="0">
+              <a:lnSpc>
+                <a:spcPct val="115000"/>
+              </a:lnSpc>
+              <a:spcBef>
+                <a:spcPts val="0"/>
+              </a:spcBef>
+              <a:buClr>
+                <a:schemeClr val="dk2"/>
+              </a:buClr>
+              <a:buSzPts val="1400"/>
+              <a:buNone/>
+            </a:pPr>
+            <a:r>
+              <a:rPr lang="en-US" sz="1400" b="0" i="0" u="none" strike="noStrike" cap="none" dirty="0" err="1">
+                <a:solidFill>
+                  <a:srgbClr val="000000"/>
+                </a:solidFill>
+                <a:latin typeface="Arial"/>
+                <a:ea typeface="Arial"/>
+                <a:cs typeface="Arial"/>
+                <a:sym typeface="Arial"/>
+              </a:rPr>
+              <a:t>SimpleNet</a:t>
+            </a:r>
+            <a:r>
+              <a:rPr lang="en-US" sz="1400" dirty="0">
+                <a:solidFill>
+                  <a:srgbClr val="000000"/>
+                </a:solidFill>
+              </a:rPr>
+              <a:t>: 56,895</a:t>
+            </a:r>
+          </a:p>
+          <a:p>
+            <a:pPr marL="0" lvl="0" indent="0">
+              <a:lnSpc>
+                <a:spcPct val="115000"/>
+              </a:lnSpc>
+              <a:spcBef>
+                <a:spcPts val="0"/>
+              </a:spcBef>
+              <a:buClr>
+                <a:schemeClr val="dk2"/>
+              </a:buClr>
+              <a:buSzPts val="1400"/>
+              <a:buNone/>
+            </a:pPr>
+            <a:r>
+              <a:rPr lang="en-US" sz="1400" b="0" i="0" u="none" strike="noStrike" cap="none" dirty="0" err="1">
+                <a:solidFill>
+                  <a:srgbClr val="000000"/>
+                </a:solidFill>
+                <a:latin typeface="Arial"/>
+                <a:ea typeface="Arial"/>
+                <a:cs typeface="Arial"/>
+                <a:sym typeface="Arial"/>
+              </a:rPr>
+              <a:t>SimpleNet</a:t>
+            </a:r>
+            <a:r>
+              <a:rPr lang="en-US" sz="1400" dirty="0" err="1">
+                <a:solidFill>
+                  <a:srgbClr val="000000"/>
+                </a:solidFill>
+              </a:rPr>
+              <a:t>Final</a:t>
+            </a:r>
+            <a:r>
+              <a:rPr lang="en-US" sz="1400" dirty="0">
+                <a:solidFill>
+                  <a:srgbClr val="000000"/>
+                </a:solidFill>
+              </a:rPr>
+              <a:t>: 26,675</a:t>
+            </a:r>
+            <a:endParaRPr sz="1400" b="0" i="0" u="none" strike="noStrike" cap="none" dirty="0">
               <a:solidFill>
                 <a:srgbClr val="000000"/>
               </a:solidFill>
@@ -19131,7 +20683,7 @@
               <a:buNone/>
             </a:pPr>
             <a:r>
-              <a:rPr lang="en" sz="1400" b="0" i="0" u="none" strike="noStrike" cap="none">
+              <a:rPr lang="en" sz="1400" b="0" i="0" u="none" strike="noStrike" cap="none" dirty="0">
                 <a:solidFill>
                   <a:schemeClr val="dk2"/>
                 </a:solidFill>
@@ -19142,9 +20694,237 @@
               </a:rPr>
               <a:t>[What is the effect of batch norm after a conv layer with a bias?]</a:t>
             </a:r>
-            <a:endParaRPr sz="1400" b="0" i="0" u="none" strike="noStrike" cap="none">
+          </a:p>
+          <a:p>
+            <a:pPr marL="0" marR="0" lvl="0" indent="0" algn="l" rtl="0">
+              <a:lnSpc>
+                <a:spcPct val="115000"/>
+              </a:lnSpc>
+              <a:spcBef>
+                <a:spcPts val="0"/>
+              </a:spcBef>
+              <a:spcAft>
+                <a:spcPts val="0"/>
+              </a:spcAft>
+              <a:buClr>
+                <a:schemeClr val="dk2"/>
+              </a:buClr>
+              <a:buSzPts val="1400"/>
+              <a:buFont typeface="Arial"/>
+              <a:buNone/>
+            </a:pPr>
+            <a:r>
+              <a:rPr lang="en" sz="1400" b="0" i="0" u="none" strike="noStrike" cap="none" dirty="0">
+                <a:solidFill>
+                  <a:schemeClr val="tx1"/>
+                </a:solidFill>
+                <a:latin typeface="Arial"/>
+                <a:ea typeface="Arial"/>
+                <a:cs typeface="Arial"/>
+                <a:sym typeface="Arial"/>
+              </a:rPr>
+              <a:t>When </a:t>
+            </a:r>
+            <a:r>
+              <a:rPr lang="en" sz="1400" b="0" i="0" u="none" strike="noStrike" cap="none" dirty="0" err="1">
+                <a:solidFill>
+                  <a:schemeClr val="tx1"/>
+                </a:solidFill>
+                <a:latin typeface="Arial"/>
+                <a:ea typeface="Arial"/>
+                <a:cs typeface="Arial"/>
+                <a:sym typeface="Arial"/>
+              </a:rPr>
+              <a:t>batchnorm</a:t>
+            </a:r>
+            <a:r>
+              <a:rPr lang="en" sz="1400" b="0" i="0" u="none" strike="noStrike" cap="none" dirty="0">
+                <a:solidFill>
+                  <a:schemeClr val="tx1"/>
+                </a:solidFill>
+                <a:latin typeface="Arial"/>
+                <a:ea typeface="Arial"/>
+                <a:cs typeface="Arial"/>
+                <a:sym typeface="Arial"/>
+              </a:rPr>
+              <a:t> follows a conv layer + bias, the bias essentially becomes redundant, and this can be attributed to the following explanation. </a:t>
+            </a:r>
+          </a:p>
+          <a:p>
+            <a:pPr marL="0" marR="0" lvl="0" indent="0" algn="l" rtl="0">
+              <a:lnSpc>
+                <a:spcPct val="115000"/>
+              </a:lnSpc>
+              <a:spcBef>
+                <a:spcPts val="0"/>
+              </a:spcBef>
+              <a:spcAft>
+                <a:spcPts val="0"/>
+              </a:spcAft>
+              <a:buClr>
+                <a:schemeClr val="dk2"/>
+              </a:buClr>
+              <a:buSzPts val="1400"/>
+              <a:buFont typeface="Arial"/>
+              <a:buNone/>
+            </a:pPr>
+            <a:r>
+              <a:rPr lang="en-IN" sz="1400" dirty="0">
+                <a:solidFill>
+                  <a:schemeClr val="tx1"/>
+                </a:solidFill>
+              </a:rPr>
+              <a:t>O</a:t>
+            </a:r>
+            <a:r>
+              <a:rPr lang="en" sz="1400" dirty="0" err="1">
+                <a:solidFill>
+                  <a:schemeClr val="tx1"/>
+                </a:solidFill>
+              </a:rPr>
+              <a:t>utput</a:t>
+            </a:r>
+            <a:r>
+              <a:rPr lang="en" sz="1400" dirty="0">
+                <a:solidFill>
+                  <a:schemeClr val="tx1"/>
+                </a:solidFill>
+              </a:rPr>
+              <a:t> = conv(input) + bias</a:t>
+            </a:r>
+          </a:p>
+          <a:p>
+            <a:pPr marL="0" marR="0" lvl="0" indent="0" algn="l" rtl="0">
+              <a:lnSpc>
+                <a:spcPct val="115000"/>
+              </a:lnSpc>
+              <a:spcBef>
+                <a:spcPts val="0"/>
+              </a:spcBef>
+              <a:spcAft>
+                <a:spcPts val="0"/>
+              </a:spcAft>
+              <a:buClr>
+                <a:schemeClr val="dk2"/>
+              </a:buClr>
+              <a:buSzPts val="1400"/>
+              <a:buFont typeface="Arial"/>
+              <a:buNone/>
+            </a:pPr>
+            <a:r>
+              <a:rPr lang="en-IN" sz="1400" b="0" i="0" u="none" strike="noStrike" cap="none" dirty="0">
+                <a:solidFill>
+                  <a:schemeClr val="tx1"/>
+                </a:solidFill>
+                <a:latin typeface="Arial"/>
+                <a:ea typeface="Arial"/>
+                <a:cs typeface="Arial"/>
+                <a:sym typeface="Arial"/>
+              </a:rPr>
+              <a:t>N</a:t>
+            </a:r>
+            <a:r>
+              <a:rPr lang="en" sz="1400" b="0" i="0" u="none" strike="noStrike" cap="none" dirty="0" err="1">
+                <a:solidFill>
+                  <a:schemeClr val="tx1"/>
+                </a:solidFill>
+                <a:latin typeface="Arial"/>
+                <a:ea typeface="Arial"/>
+                <a:cs typeface="Arial"/>
+                <a:sym typeface="Arial"/>
+              </a:rPr>
+              <a:t>orm_output</a:t>
+            </a:r>
+            <a:r>
+              <a:rPr lang="en" sz="1400" b="0" i="0" u="none" strike="noStrike" cap="none" dirty="0">
+                <a:solidFill>
+                  <a:schemeClr val="tx1"/>
+                </a:solidFill>
+                <a:latin typeface="Arial"/>
+                <a:ea typeface="Arial"/>
+                <a:cs typeface="Arial"/>
+                <a:sym typeface="Arial"/>
+              </a:rPr>
+              <a:t> = (output – mean)/variance</a:t>
+            </a:r>
+          </a:p>
+          <a:p>
+            <a:pPr marL="0" marR="0" lvl="0" indent="0" algn="l" rtl="0">
+              <a:lnSpc>
+                <a:spcPct val="115000"/>
+              </a:lnSpc>
+              <a:spcBef>
+                <a:spcPts val="0"/>
+              </a:spcBef>
+              <a:spcAft>
+                <a:spcPts val="0"/>
+              </a:spcAft>
+              <a:buClr>
+                <a:schemeClr val="dk2"/>
+              </a:buClr>
+              <a:buSzPts val="1400"/>
+              <a:buFont typeface="Arial"/>
+              <a:buNone/>
+            </a:pPr>
+            <a:r>
+              <a:rPr lang="en-IN" sz="1400" dirty="0">
+                <a:solidFill>
+                  <a:schemeClr val="tx1"/>
+                </a:solidFill>
+              </a:rPr>
+              <a:t>S</a:t>
+            </a:r>
+            <a:r>
+              <a:rPr lang="en" sz="1400" dirty="0" err="1">
+                <a:solidFill>
+                  <a:schemeClr val="tx1"/>
+                </a:solidFill>
+              </a:rPr>
+              <a:t>ince</a:t>
+            </a:r>
+            <a:r>
+              <a:rPr lang="en" sz="1400" dirty="0">
+                <a:solidFill>
+                  <a:schemeClr val="tx1"/>
+                </a:solidFill>
+              </a:rPr>
+              <a:t> the constant bias is added to all elements, it is also present in the mean, and therefore is subtracted in </a:t>
+            </a:r>
+            <a:r>
+              <a:rPr lang="en-IN" sz="1400" dirty="0" err="1">
+                <a:solidFill>
+                  <a:schemeClr val="tx1"/>
+                </a:solidFill>
+              </a:rPr>
+              <a:t>th</a:t>
+            </a:r>
+            <a:r>
+              <a:rPr lang="en" sz="1400" dirty="0">
+                <a:solidFill>
+                  <a:schemeClr val="tx1"/>
+                </a:solidFill>
+              </a:rPr>
+              <a:t>e numerator of the </a:t>
+            </a:r>
+            <a:r>
+              <a:rPr lang="en" sz="1400" dirty="0" err="1">
+                <a:solidFill>
+                  <a:schemeClr val="tx1"/>
+                </a:solidFill>
+              </a:rPr>
+              <a:t>norm_output</a:t>
+            </a:r>
+            <a:r>
+              <a:rPr lang="en" sz="1400" dirty="0">
+                <a:solidFill>
+                  <a:schemeClr val="tx1"/>
+                </a:solidFill>
+              </a:rPr>
+              <a:t> equation. </a:t>
+            </a:r>
+            <a:endParaRPr lang="en" sz="1400" b="0" i="0" u="none" strike="noStrike" cap="none" dirty="0">
               <a:solidFill>
-                <a:srgbClr val="000000"/>
+                <a:schemeClr val="tx1"/>
               </a:solidFill>
               <a:latin typeface="Arial"/>
               <a:ea typeface="Arial"/>
@@ -19226,7 +21006,7 @@
               <a:buNone/>
             </a:pPr>
             <a:r>
-              <a:rPr lang="en" sz="2800" b="0" strike="noStrike">
+              <a:rPr lang="en" sz="2800" b="0" strike="noStrike" dirty="0">
                 <a:solidFill>
                   <a:schemeClr val="dk1"/>
                 </a:solidFill>
@@ -19235,9 +21015,21 @@
                 <a:cs typeface="Arial"/>
                 <a:sym typeface="Arial"/>
               </a:rPr>
-              <a:t>Part 3: ResNet</a:t>
+              <a:t>Part 3: </a:t>
             </a:r>
-            <a:endParaRPr sz="2800" b="0" strike="noStrike">
+            <a:r>
+              <a:rPr lang="en" sz="2800" b="0" strike="noStrike" dirty="0" err="1">
+                <a:solidFill>
+                  <a:schemeClr val="dk1"/>
+                </a:solidFill>
+                <a:latin typeface="Arial"/>
+                <a:ea typeface="Arial"/>
+                <a:cs typeface="Arial"/>
+                <a:sym typeface="Arial"/>
+              </a:rPr>
+              <a:t>ResNet</a:t>
+            </a:r>
+            <a:endParaRPr sz="2800" b="0" strike="noStrike" dirty="0">
               <a:solidFill>
                 <a:srgbClr val="000000"/>
               </a:solidFill>
@@ -19296,7 +21088,7 @@
               <a:buNone/>
             </a:pPr>
             <a:r>
-              <a:rPr lang="en" sz="1400" b="0" i="0" u="none" strike="noStrike" cap="none">
+              <a:rPr lang="en" sz="1400" b="0" i="0" u="none" strike="noStrike" cap="none" dirty="0">
                 <a:solidFill>
                   <a:schemeClr val="dk2"/>
                 </a:solidFill>
@@ -19307,7 +21099,7 @@
               </a:rPr>
               <a:t>[Insert loss plot here]</a:t>
             </a:r>
-            <a:endParaRPr sz="1400" b="0" i="0" u="none" strike="noStrike" cap="none">
+            <a:endParaRPr sz="1400" b="0" i="0" u="none" strike="noStrike" cap="none" dirty="0">
               <a:solidFill>
                 <a:srgbClr val="000000"/>
               </a:solidFill>
@@ -19335,7 +21127,7 @@
               <a:buFont typeface="Arial"/>
               <a:buNone/>
             </a:pPr>
-            <a:endParaRPr sz="1400" b="0" i="0" u="none" strike="noStrike" cap="none">
+            <a:endParaRPr sz="1400" b="0" i="0" u="none" strike="noStrike" cap="none" dirty="0">
               <a:solidFill>
                 <a:srgbClr val="000000"/>
               </a:solidFill>
@@ -19363,7 +21155,7 @@
               <a:buFont typeface="Arial"/>
               <a:buNone/>
             </a:pPr>
-            <a:endParaRPr sz="1400" b="0" i="0" u="none" strike="noStrike" cap="none">
+            <a:endParaRPr sz="1400" b="0" i="0" u="none" strike="noStrike" cap="none" dirty="0">
               <a:solidFill>
                 <a:srgbClr val="000000"/>
               </a:solidFill>
@@ -19391,7 +21183,7 @@
               <a:buFont typeface="Arial"/>
               <a:buNone/>
             </a:pPr>
-            <a:endParaRPr sz="1400" b="0" i="0" u="none" strike="noStrike" cap="none">
+            <a:endParaRPr sz="1400" b="0" i="0" u="none" strike="noStrike" cap="none" dirty="0">
               <a:solidFill>
                 <a:srgbClr val="000000"/>
               </a:solidFill>
@@ -19419,7 +21211,7 @@
               <a:buFont typeface="Arial"/>
               <a:buNone/>
             </a:pPr>
-            <a:endParaRPr sz="1400" b="0" i="0" u="none" strike="noStrike" cap="none">
+            <a:endParaRPr sz="1400" b="0" i="0" u="none" strike="noStrike" cap="none" dirty="0">
               <a:solidFill>
                 <a:srgbClr val="000000"/>
               </a:solidFill>
@@ -19447,7 +21239,7 @@
               <a:buFont typeface="Arial"/>
               <a:buNone/>
             </a:pPr>
-            <a:endParaRPr sz="1400" b="0" i="0" u="none" strike="noStrike" cap="none">
+            <a:endParaRPr sz="1400" b="0" i="0" u="none" strike="noStrike" cap="none" dirty="0">
               <a:solidFill>
                 <a:srgbClr val="000000"/>
               </a:solidFill>
@@ -19475,7 +21267,7 @@
               <a:buFont typeface="Arial"/>
               <a:buNone/>
             </a:pPr>
-            <a:endParaRPr sz="1400" b="0" i="0" u="none" strike="noStrike" cap="none">
+            <a:endParaRPr sz="1400" b="0" i="0" u="none" strike="noStrike" cap="none" dirty="0">
               <a:solidFill>
                 <a:srgbClr val="000000"/>
               </a:solidFill>
@@ -19503,7 +21295,7 @@
               <a:buFont typeface="Arial"/>
               <a:buNone/>
             </a:pPr>
-            <a:endParaRPr sz="1400" b="0" i="0" u="none" strike="noStrike" cap="none">
+            <a:endParaRPr sz="1400" b="0" i="0" u="none" strike="noStrike" cap="none" dirty="0">
               <a:solidFill>
                 <a:srgbClr val="000000"/>
               </a:solidFill>
@@ -19531,7 +21323,7 @@
               <a:buFont typeface="Arial"/>
               <a:buNone/>
             </a:pPr>
-            <a:endParaRPr sz="1400" b="0" i="0" u="none" strike="noStrike" cap="none">
+            <a:endParaRPr sz="1400" b="0" i="0" u="none" strike="noStrike" cap="none" dirty="0">
               <a:solidFill>
                 <a:srgbClr val="000000"/>
               </a:solidFill>
@@ -19559,7 +21351,7 @@
               <a:buFont typeface="Arial"/>
               <a:buNone/>
             </a:pPr>
-            <a:endParaRPr sz="1400" b="0" i="0" u="none" strike="noStrike" cap="none">
+            <a:endParaRPr sz="1400" b="0" i="0" u="none" strike="noStrike" cap="none" dirty="0">
               <a:solidFill>
                 <a:srgbClr val="000000"/>
               </a:solidFill>
@@ -19588,7 +21380,7 @@
               <a:buNone/>
             </a:pPr>
             <a:r>
-              <a:rPr lang="en" sz="1400" b="0" i="0" u="none" strike="noStrike" cap="none">
+              <a:rPr lang="en" sz="1400" b="0" i="0" u="none" strike="noStrike" cap="none" dirty="0">
                 <a:solidFill>
                   <a:schemeClr val="dk2"/>
                 </a:solidFill>
@@ -19597,9 +21389,9 @@
                 <a:cs typeface="Arial"/>
                 <a:sym typeface="Arial"/>
               </a:rPr>
-              <a:t>Final training accuracy:</a:t>
+              <a:t>Final training accuracy: 87.8392%</a:t>
             </a:r>
-            <a:endParaRPr sz="1400" b="0" i="0" u="none" strike="noStrike" cap="none">
+            <a:endParaRPr sz="1400" b="0" i="0" u="none" strike="noStrike" cap="none" dirty="0">
               <a:solidFill>
                 <a:srgbClr val="000000"/>
               </a:solidFill>
@@ -19627,7 +21419,7 @@
               <a:buFont typeface="Arial"/>
               <a:buNone/>
             </a:pPr>
-            <a:endParaRPr sz="1400" b="0" i="0" u="none" strike="noStrike" cap="none">
+            <a:endParaRPr sz="1400" b="0" i="0" u="none" strike="noStrike" cap="none" dirty="0">
               <a:solidFill>
                 <a:srgbClr val="000000"/>
               </a:solidFill>
@@ -19656,7 +21448,7 @@
               <a:buNone/>
             </a:pPr>
             <a:r>
-              <a:rPr lang="en" sz="1400" b="0" i="0" u="none" strike="noStrike" cap="none">
+              <a:rPr lang="en" sz="1400" b="0" i="0" u="none" strike="noStrike" cap="none" dirty="0">
                 <a:solidFill>
                   <a:schemeClr val="dk2"/>
                 </a:solidFill>
@@ -19665,9 +21457,9 @@
                 <a:cs typeface="Arial"/>
                 <a:sym typeface="Arial"/>
               </a:rPr>
-              <a:t>Final validation accuracy:</a:t>
+              <a:t>Final validation accuracy: 87.667%</a:t>
             </a:r>
-            <a:endParaRPr sz="1400" b="0" i="0" u="none" strike="noStrike" cap="none">
+            <a:endParaRPr sz="1400" b="0" i="0" u="none" strike="noStrike" cap="none" dirty="0">
               <a:solidFill>
                 <a:srgbClr val="000000"/>
               </a:solidFill>
@@ -19749,6 +21541,66 @@
           </a:p>
         </p:txBody>
       </p:sp>
+      <p:pic>
+        <p:nvPicPr>
+          <p:cNvPr id="2" name="Picture 1">
+            <a:extLst>
+              <a:ext uri="{FF2B5EF4-FFF2-40B4-BE49-F238E27FC236}">
+                <a16:creationId xmlns:a16="http://schemas.microsoft.com/office/drawing/2014/main" id="{BEE658F2-E589-8043-B60E-2380B621F3B7}"/>
+              </a:ext>
+            </a:extLst>
+          </p:cNvPr>
+          <p:cNvPicPr>
+            <a:picLocks noChangeAspect="1"/>
+          </p:cNvPicPr>
+          <p:nvPr/>
+        </p:nvPicPr>
+        <p:blipFill>
+          <a:blip r:embed="rId3"/>
+          <a:stretch>
+            <a:fillRect/>
+          </a:stretch>
+        </p:blipFill>
+        <p:spPr>
+          <a:xfrm>
+            <a:off x="311760" y="1565952"/>
+            <a:ext cx="2518945" cy="2011596"/>
+          </a:xfrm>
+          <a:prstGeom prst="rect">
+            <a:avLst/>
+          </a:prstGeom>
+        </p:spPr>
+      </p:pic>
+      <p:pic>
+        <p:nvPicPr>
+          <p:cNvPr id="3" name="Picture 2">
+            <a:extLst>
+              <a:ext uri="{FF2B5EF4-FFF2-40B4-BE49-F238E27FC236}">
+                <a16:creationId xmlns:a16="http://schemas.microsoft.com/office/drawing/2014/main" id="{FC46774A-8405-D445-ACAC-1B2A66FB34A3}"/>
+              </a:ext>
+            </a:extLst>
+          </p:cNvPr>
+          <p:cNvPicPr>
+            <a:picLocks noChangeAspect="1"/>
+          </p:cNvPicPr>
+          <p:nvPr/>
+        </p:nvPicPr>
+        <p:blipFill>
+          <a:blip r:embed="rId4"/>
+          <a:stretch>
+            <a:fillRect/>
+          </a:stretch>
+        </p:blipFill>
+        <p:spPr>
+          <a:xfrm>
+            <a:off x="4575426" y="1565952"/>
+            <a:ext cx="3657600" cy="2870200"/>
+          </a:xfrm>
+          <a:prstGeom prst="rect">
+            <a:avLst/>
+          </a:prstGeom>
+        </p:spPr>
+      </p:pic>
     </p:spTree>
   </p:cSld>
   <p:clrMapOvr>
@@ -19786,7 +21638,7 @@
         </p:nvSpPr>
         <p:spPr>
           <a:xfrm>
-            <a:off x="311760" y="444960"/>
+            <a:off x="311760" y="59949"/>
             <a:ext cx="8520120" cy="572400"/>
           </a:xfrm>
           <a:prstGeom prst="rect">
@@ -19821,7 +21673,7 @@
               <a:buNone/>
             </a:pPr>
             <a:r>
-              <a:rPr lang="en" sz="2800" b="0" strike="noStrike">
+              <a:rPr lang="en" sz="2800" b="0" strike="noStrike" dirty="0">
                 <a:solidFill>
                   <a:schemeClr val="dk1"/>
                 </a:solidFill>
@@ -19830,9 +21682,21 @@
                 <a:cs typeface="Arial"/>
                 <a:sym typeface="Arial"/>
               </a:rPr>
-              <a:t>Part 3: ResNet</a:t>
+              <a:t>Part 3: </a:t>
             </a:r>
-            <a:endParaRPr sz="2800" b="0" strike="noStrike">
+            <a:r>
+              <a:rPr lang="en" sz="2800" b="0" strike="noStrike" dirty="0" err="1">
+                <a:solidFill>
+                  <a:schemeClr val="dk1"/>
+                </a:solidFill>
+                <a:latin typeface="Arial"/>
+                <a:ea typeface="Arial"/>
+                <a:cs typeface="Arial"/>
+                <a:sym typeface="Arial"/>
+              </a:rPr>
+              <a:t>ResNet</a:t>
+            </a:r>
+            <a:endParaRPr sz="2800" b="0" strike="noStrike" dirty="0">
               <a:solidFill>
                 <a:srgbClr val="000000"/>
               </a:solidFill>
@@ -19844,76 +21708,36 @@
           </a:p>
         </p:txBody>
       </p:sp>
-      <p:sp>
-        <p:nvSpPr>
-          <p:cNvPr id="130" name="Google Shape;130;p26"/>
-          <p:cNvSpPr txBox="1">
-            <a:spLocks noGrp="1"/>
-          </p:cNvSpPr>
-          <p:nvPr>
-            <p:ph type="body" idx="1"/>
-          </p:nvPr>
-        </p:nvSpPr>
+      <p:pic>
+        <p:nvPicPr>
+          <p:cNvPr id="2" name="Picture 1">
+            <a:extLst>
+              <a:ext uri="{FF2B5EF4-FFF2-40B4-BE49-F238E27FC236}">
+                <a16:creationId xmlns:a16="http://schemas.microsoft.com/office/drawing/2014/main" id="{8B39E6D8-FE60-EC4B-B66E-64AD6A8564B3}"/>
+              </a:ext>
+            </a:extLst>
+          </p:cNvPr>
+          <p:cNvPicPr>
+            <a:picLocks noChangeAspect="1"/>
+          </p:cNvPicPr>
+          <p:nvPr/>
+        </p:nvPicPr>
+        <p:blipFill>
+          <a:blip r:embed="rId3"/>
+          <a:stretch>
+            <a:fillRect/>
+          </a:stretch>
+        </p:blipFill>
         <p:spPr>
           <a:xfrm>
-            <a:off x="311760" y="1152360"/>
-            <a:ext cx="8520120" cy="3416040"/>
+            <a:off x="1684422" y="567429"/>
+            <a:ext cx="4555957" cy="4576071"/>
           </a:xfrm>
           <a:prstGeom prst="rect">
             <a:avLst/>
           </a:prstGeom>
-          <a:noFill/>
-          <a:ln>
-            <a:noFill/>
-          </a:ln>
         </p:spPr>
-        <p:txBody>
-          <a:bodyPr spcFirstLastPara="1" wrap="square" lIns="91425" tIns="91425" rIns="91425" bIns="91425" anchor="t" anchorCtr="0">
-            <a:noAutofit/>
-          </a:bodyPr>
-          <a:lstStyle/>
-          <a:p>
-            <a:pPr marL="0" marR="0" lvl="0" indent="0" algn="l" rtl="0">
-              <a:lnSpc>
-                <a:spcPct val="115000"/>
-              </a:lnSpc>
-              <a:spcBef>
-                <a:spcPts val="0"/>
-              </a:spcBef>
-              <a:spcAft>
-                <a:spcPts val="0"/>
-              </a:spcAft>
-              <a:buClr>
-                <a:schemeClr val="dk2"/>
-              </a:buClr>
-              <a:buSzPts val="1800"/>
-              <a:buFont typeface="Arial"/>
-              <a:buNone/>
-            </a:pPr>
-            <a:r>
-              <a:rPr lang="en" sz="1800" b="0" i="0" u="none" strike="noStrike" cap="none">
-                <a:solidFill>
-                  <a:schemeClr val="dk2"/>
-                </a:solidFill>
-                <a:latin typeface="Arial"/>
-                <a:ea typeface="Arial"/>
-                <a:cs typeface="Arial"/>
-                <a:sym typeface="Arial"/>
-              </a:rPr>
-              <a:t>[Insert visualization of confusion matrix obtained from your final ResNet model.]</a:t>
-            </a:r>
-            <a:endParaRPr sz="1800" b="0" i="0" u="none" strike="noStrike" cap="none">
-              <a:solidFill>
-                <a:srgbClr val="000000"/>
-              </a:solidFill>
-              <a:latin typeface="Arial"/>
-              <a:ea typeface="Arial"/>
-              <a:cs typeface="Arial"/>
-              <a:sym typeface="Arial"/>
-            </a:endParaRPr>
-          </a:p>
-        </p:txBody>
-      </p:sp>
+      </p:pic>
     </p:spTree>
   </p:cSld>
   <p:clrMapOvr>
@@ -19951,7 +21775,7 @@
         </p:nvSpPr>
         <p:spPr>
           <a:xfrm>
-            <a:off x="311760" y="444960"/>
+            <a:off x="311760" y="200594"/>
             <a:ext cx="8520120" cy="572400"/>
           </a:xfrm>
           <a:prstGeom prst="rect">
@@ -19986,7 +21810,7 @@
               <a:buNone/>
             </a:pPr>
             <a:r>
-              <a:rPr lang="en" sz="2800" b="0" strike="noStrike">
+              <a:rPr lang="en" sz="2800" b="0" strike="noStrike" dirty="0">
                 <a:solidFill>
                   <a:schemeClr val="dk1"/>
                 </a:solidFill>
@@ -19995,9 +21819,21 @@
                 <a:cs typeface="Arial"/>
                 <a:sym typeface="Arial"/>
               </a:rPr>
-              <a:t>Part 3: ResNet</a:t>
+              <a:t>Part 3: </a:t>
             </a:r>
-            <a:endParaRPr sz="2800" b="0" strike="noStrike">
+            <a:r>
+              <a:rPr lang="en" sz="2800" b="0" strike="noStrike" dirty="0" err="1">
+                <a:solidFill>
+                  <a:schemeClr val="dk1"/>
+                </a:solidFill>
+                <a:latin typeface="Arial"/>
+                <a:ea typeface="Arial"/>
+                <a:cs typeface="Arial"/>
+                <a:sym typeface="Arial"/>
+              </a:rPr>
+              <a:t>ResNet</a:t>
+            </a:r>
+            <a:endParaRPr sz="2800" b="0" strike="noStrike" dirty="0">
               <a:solidFill>
                 <a:srgbClr val="000000"/>
               </a:solidFill>
@@ -20021,8 +21857,8 @@
         </p:nvSpPr>
         <p:spPr>
           <a:xfrm>
-            <a:off x="311760" y="1152360"/>
-            <a:ext cx="8520120" cy="3416040"/>
+            <a:off x="311760" y="772994"/>
+            <a:ext cx="8520120" cy="3795406"/>
           </a:xfrm>
           <a:prstGeom prst="rect">
             <a:avLst/>
@@ -20056,29 +21892,74 @@
               <a:buNone/>
             </a:pPr>
             <a:r>
-              <a:rPr lang="en" sz="1800" b="0" i="0" u="none" strike="noStrike" cap="none">
-                <a:solidFill>
-                  <a:schemeClr val="dk2"/>
+              <a:rPr lang="en-IN" sz="1200" b="0" i="0" u="none" strike="noStrike" cap="none" dirty="0">
+                <a:solidFill>
+                  <a:srgbClr val="000000"/>
                 </a:solidFill>
                 <a:latin typeface="Arial"/>
                 <a:ea typeface="Arial"/>
                 <a:cs typeface="Arial"/>
                 <a:sym typeface="Arial"/>
               </a:rPr>
-              <a:t>[Insert visualizations of 3 misclassified images from the most misclassified class according to your confusion matrix. Explain why this may have occurred.]</a:t>
+              <a:t>This misclassification of predicting living room for what is actually a bedroom might’ve happened due to similarities in the visual and contextual space of the </a:t>
             </a:r>
-            <a:endParaRPr sz="1800" b="0" i="0" u="none" strike="noStrike" cap="none">
-              <a:solidFill>
-                <a:srgbClr val="000000"/>
-              </a:solidFill>
-              <a:latin typeface="Arial"/>
-              <a:ea typeface="Arial"/>
-              <a:cs typeface="Arial"/>
-              <a:sym typeface="Arial"/>
-            </a:endParaRPr>
+            <a:r>
+              <a:rPr lang="en-IN" sz="1200" b="0" i="0" u="none" strike="noStrike" cap="none" dirty="0" err="1">
+                <a:solidFill>
+                  <a:srgbClr val="000000"/>
+                </a:solidFill>
+                <a:latin typeface="Arial"/>
+                <a:ea typeface="Arial"/>
+                <a:cs typeface="Arial"/>
+                <a:sym typeface="Arial"/>
+              </a:rPr>
+              <a:t>ResNet</a:t>
+            </a:r>
+            <a:r>
+              <a:rPr lang="en-IN" sz="1200" b="0" i="0" u="none" strike="noStrike" cap="none" dirty="0">
+                <a:solidFill>
+                  <a:srgbClr val="000000"/>
+                </a:solidFill>
+                <a:latin typeface="Arial"/>
+                <a:ea typeface="Arial"/>
+                <a:cs typeface="Arial"/>
+                <a:sym typeface="Arial"/>
+              </a:rPr>
+              <a:t> model. Both often contain similar kind of furniture, with common objects like chairs, tables, and lamps. From the model’s perspective, the learned features of textures and shapes in both these classes are alike to an extent that it can struggle to find subtle characteristics that differentiate the two.</a:t>
+            </a:r>
           </a:p>
         </p:txBody>
       </p:sp>
+      <p:pic>
+        <p:nvPicPr>
+          <p:cNvPr id="2" name="Picture 1">
+            <a:extLst>
+              <a:ext uri="{FF2B5EF4-FFF2-40B4-BE49-F238E27FC236}">
+                <a16:creationId xmlns:a16="http://schemas.microsoft.com/office/drawing/2014/main" id="{8149C08C-C7BE-2348-A9B5-773173223092}"/>
+              </a:ext>
+            </a:extLst>
+          </p:cNvPr>
+          <p:cNvPicPr>
+            <a:picLocks noChangeAspect="1"/>
+          </p:cNvPicPr>
+          <p:nvPr/>
+        </p:nvPicPr>
+        <p:blipFill>
+          <a:blip r:embed="rId3"/>
+          <a:stretch>
+            <a:fillRect/>
+          </a:stretch>
+        </p:blipFill>
+        <p:spPr>
+          <a:xfrm>
+            <a:off x="663430" y="1883979"/>
+            <a:ext cx="7816780" cy="2605593"/>
+          </a:xfrm>
+          <a:prstGeom prst="rect">
+            <a:avLst/>
+          </a:prstGeom>
+        </p:spPr>
+      </p:pic>
     </p:spTree>
   </p:cSld>
   <p:clrMapOvr>
